--- a/public/lessons/year-6-maths/autumn/week-8/solve-multi-step-multiplication-and-division-problems/teaching-powerpoint-v1.pptx
+++ b/public/lessons/year-6-maths/autumn/week-8/solve-multi-step-multiplication-and-division-problems/teaching-powerpoint-v1.pptx
@@ -2,24 +2,24 @@
 <file path=ppt/presentation.xml><?xml version="1.0" encoding="utf-8"?>
 <p:presentation xmlns:p="http://schemas.openxmlformats.org/presentationml/2006/main">
   <p:sldMasterIdLst>
-    <p:sldMasterId xmlns:r="http://schemas.openxmlformats.org/officeDocument/2006/relationships" id="2147483648" r:id="R81d72aafdca64f2a"/>
+    <p:sldMasterId xmlns:r="http://schemas.openxmlformats.org/officeDocument/2006/relationships" id="2147483648" r:id="Rc854a847b8af4f9e"/>
   </p:sldMasterIdLst>
   <p:notesMasterIdLst>
-    <p:notesMasterId xmlns:r="http://schemas.openxmlformats.org/officeDocument/2006/relationships" r:id="R44bdb6005cd44bc1"/>
+    <p:notesMasterId xmlns:r="http://schemas.openxmlformats.org/officeDocument/2006/relationships" r:id="Ra497e0890a3e4db3"/>
   </p:notesMasterIdLst>
   <p:sldIdLst>
-    <p:sldId xmlns:r="http://schemas.openxmlformats.org/officeDocument/2006/relationships" id="256" r:id="R65c80de7a8f24e3b"/>
-    <p:sldId xmlns:r="http://schemas.openxmlformats.org/officeDocument/2006/relationships" id="257" r:id="Rb9894b8d70934900"/>
-    <p:sldId xmlns:r="http://schemas.openxmlformats.org/officeDocument/2006/relationships" id="258" r:id="R3ca3245e297f42b9"/>
-    <p:sldId xmlns:r="http://schemas.openxmlformats.org/officeDocument/2006/relationships" id="259" r:id="Rc4ffa69217394ffc"/>
-    <p:sldId xmlns:r="http://schemas.openxmlformats.org/officeDocument/2006/relationships" id="260" r:id="Rd415ca950a2540bc"/>
-    <p:sldId xmlns:r="http://schemas.openxmlformats.org/officeDocument/2006/relationships" id="261" r:id="R78dceb7b4a144008"/>
-    <p:sldId xmlns:r="http://schemas.openxmlformats.org/officeDocument/2006/relationships" id="262" r:id="Rf87c4664ad3a4457"/>
-    <p:sldId xmlns:r="http://schemas.openxmlformats.org/officeDocument/2006/relationships" id="263" r:id="Re18cda9b4f4d4f92"/>
-    <p:sldId xmlns:r="http://schemas.openxmlformats.org/officeDocument/2006/relationships" id="264" r:id="R9e1fd3778118477b"/>
-    <p:sldId xmlns:r="http://schemas.openxmlformats.org/officeDocument/2006/relationships" id="265" r:id="R8c6457c747a446ab"/>
-    <p:sldId xmlns:r="http://schemas.openxmlformats.org/officeDocument/2006/relationships" id="266" r:id="Rf19e8f7a44ca4675"/>
-    <p:sldId xmlns:r="http://schemas.openxmlformats.org/officeDocument/2006/relationships" id="267" r:id="R2ef75353534d4979"/>
+    <p:sldId xmlns:r="http://schemas.openxmlformats.org/officeDocument/2006/relationships" id="256" r:id="Ra093b699492e45f0"/>
+    <p:sldId xmlns:r="http://schemas.openxmlformats.org/officeDocument/2006/relationships" id="257" r:id="R9c8b9460d5dd4a38"/>
+    <p:sldId xmlns:r="http://schemas.openxmlformats.org/officeDocument/2006/relationships" id="258" r:id="R42a9c1cf894a4f7c"/>
+    <p:sldId xmlns:r="http://schemas.openxmlformats.org/officeDocument/2006/relationships" id="259" r:id="Raf79fc491c7745ac"/>
+    <p:sldId xmlns:r="http://schemas.openxmlformats.org/officeDocument/2006/relationships" id="260" r:id="Rb97222c2e1db4f5c"/>
+    <p:sldId xmlns:r="http://schemas.openxmlformats.org/officeDocument/2006/relationships" id="261" r:id="R7fbe83e1a86546d3"/>
+    <p:sldId xmlns:r="http://schemas.openxmlformats.org/officeDocument/2006/relationships" id="262" r:id="R984e6aa68a8f4968"/>
+    <p:sldId xmlns:r="http://schemas.openxmlformats.org/officeDocument/2006/relationships" id="263" r:id="R2bf44c40c8db4123"/>
+    <p:sldId xmlns:r="http://schemas.openxmlformats.org/officeDocument/2006/relationships" id="264" r:id="Rc00d55c0fa2f49ad"/>
+    <p:sldId xmlns:r="http://schemas.openxmlformats.org/officeDocument/2006/relationships" id="265" r:id="R4fc093a7c7ab4fa8"/>
+    <p:sldId xmlns:r="http://schemas.openxmlformats.org/officeDocument/2006/relationships" id="266" r:id="Ra3fe261fe5db4895"/>
+    <p:sldId xmlns:r="http://schemas.openxmlformats.org/officeDocument/2006/relationships" id="267" r:id="R32c06e99c3be4dd1"/>
   </p:sldIdLst>
   <p:sldSz cx="12192000" cy="6858000"/>
   <p:notesSz cx="6858000" cy="9144000"/>
@@ -873,7 +873,7 @@
           <a:lstStyle xmlns:a="http://schemas.openxmlformats.org/drawingml/2006/main"/>
           <a:p xmlns:a="http://schemas.openxmlformats.org/drawingml/2006/main">
             <a:r>
-              <a:t>I do. Reveal the question, setup and each calculation stage one click at a time. Pupils watch before copying. Model answer: 48 boxes.</a:t>
+              <a:t>I do. Reveal the question, then reveal each mathematical change one click at a time. Point to the numbers and operation that changed before moving to the next line. Final answer: 48 boxes.</a:t>
             </a:r>
           </a:p>
         </p:txBody>
@@ -1291,7 +1291,7 @@
   </p:cSld>
   <p:clrMap bg1="lt1" tx1="dk1" bg2="lt2" tx2="dk2" accent1="accent1" accent2="accent2" accent3="accent3" accent4="accent4" accent5="accent5" accent6="accent6" hlink="hlink" folHlink="folHlink"/>
   <p:sldLayoutIdLst>
-    <p:sldLayoutId xmlns:r="http://schemas.openxmlformats.org/officeDocument/2006/relationships" id="2147483649" r:id="R3a8b5075978347d8"/>
+    <p:sldLayoutId xmlns:r="http://schemas.openxmlformats.org/officeDocument/2006/relationships" id="2147483649" r:id="Rd522c8c764ec4c40"/>
   </p:sldLayoutIdLst>
   <p:txStyles>
     <p:titleStyle>
@@ -1842,7 +1842,7 @@
           <p:cNvPr id="12" name="">
             <a:extLst xmlns:a="http://schemas.openxmlformats.org/drawingml/2006/main">
               <a:ext uri="{FF2B5EF4-FFF2-40B4-BE49-F238E27FC236}">
-                <a16:creationId xmlns:a16="http://schemas.microsoft.com/office/drawing/2014/main" id="{3304C534-BC45-46DB-82B7-551389E0E064}"/>
+                <a16:creationId xmlns:a16="http://schemas.microsoft.com/office/drawing/2014/main" id="{55741915-B5B6-4D9C-AB1C-1F789EA32BB4}"/>
               </a:ext>
             </a:extLst>
           </p:cNvPr>
@@ -1874,7 +1874,7 @@
           <p:cNvPr id="2" name="">
             <a:extLst xmlns:a="http://schemas.openxmlformats.org/drawingml/2006/main">
               <a:ext uri="{FF2B5EF4-FFF2-40B4-BE49-F238E27FC236}">
-                <a16:creationId xmlns:a16="http://schemas.microsoft.com/office/drawing/2014/main" id="{BDC06DC1-FDA6-4844-96FB-5762AF8388C2}"/>
+                <a16:creationId xmlns:a16="http://schemas.microsoft.com/office/drawing/2014/main" id="{93DFE803-7BD8-443C-9DFB-8E448BE27802}"/>
               </a:ext>
             </a:extLst>
           </p:cNvPr>
@@ -1931,7 +1931,7 @@
           <p:cNvPr id="3" name="">
             <a:extLst xmlns:a="http://schemas.openxmlformats.org/drawingml/2006/main">
               <a:ext uri="{FF2B5EF4-FFF2-40B4-BE49-F238E27FC236}">
-                <a16:creationId xmlns:a16="http://schemas.microsoft.com/office/drawing/2014/main" id="{70E7001C-A987-4BB3-91CE-E14C924129CE}"/>
+                <a16:creationId xmlns:a16="http://schemas.microsoft.com/office/drawing/2014/main" id="{77C23195-5DED-44CD-A764-B6C4ADD803DA}"/>
               </a:ext>
             </a:extLst>
           </p:cNvPr>
@@ -1965,7 +1965,7 @@
           <p:cNvPr id="4" name="">
             <a:extLst xmlns:a="http://schemas.openxmlformats.org/drawingml/2006/main">
               <a:ext uri="{FF2B5EF4-FFF2-40B4-BE49-F238E27FC236}">
-                <a16:creationId xmlns:a16="http://schemas.microsoft.com/office/drawing/2014/main" id="{B6A331C2-3BE3-4E7D-946F-8FE2DCCC7CBC}"/>
+                <a16:creationId xmlns:a16="http://schemas.microsoft.com/office/drawing/2014/main" id="{BE9C7F07-471E-4A53-9693-9D54482F1271}"/>
               </a:ext>
             </a:extLst>
           </p:cNvPr>
@@ -2022,7 +2022,7 @@
           <p:cNvPr id="5" name="">
             <a:extLst xmlns:a="http://schemas.openxmlformats.org/drawingml/2006/main">
               <a:ext uri="{FF2B5EF4-FFF2-40B4-BE49-F238E27FC236}">
-                <a16:creationId xmlns:a16="http://schemas.microsoft.com/office/drawing/2014/main" id="{DE21B1C8-A34A-4C4D-B0B8-8FAFDEAD97DF}"/>
+                <a16:creationId xmlns:a16="http://schemas.microsoft.com/office/drawing/2014/main" id="{7998DB61-A691-4F3D-8277-ECE25281B5D5}"/>
               </a:ext>
             </a:extLst>
           </p:cNvPr>
@@ -2079,7 +2079,7 @@
           <p:cNvPr id="6" name="">
             <a:extLst xmlns:a="http://schemas.openxmlformats.org/drawingml/2006/main">
               <a:ext uri="{FF2B5EF4-FFF2-40B4-BE49-F238E27FC236}">
-                <a16:creationId xmlns:a16="http://schemas.microsoft.com/office/drawing/2014/main" id="{C56645D0-E6D7-47D7-BB13-3A6CDB2FC5B5}"/>
+                <a16:creationId xmlns:a16="http://schemas.microsoft.com/office/drawing/2014/main" id="{477DF547-37F4-4165-B976-7FBB7BE3399A}"/>
               </a:ext>
             </a:extLst>
           </p:cNvPr>
@@ -2113,7 +2113,7 @@
           <p:cNvPr id="7" name="">
             <a:extLst xmlns:a="http://schemas.openxmlformats.org/drawingml/2006/main">
               <a:ext uri="{FF2B5EF4-FFF2-40B4-BE49-F238E27FC236}">
-                <a16:creationId xmlns:a16="http://schemas.microsoft.com/office/drawing/2014/main" id="{55E5ED71-C679-4F8B-9180-9A6D50D91B3A}"/>
+                <a16:creationId xmlns:a16="http://schemas.microsoft.com/office/drawing/2014/main" id="{2917EAF4-2555-4046-810F-84D4B5023464}"/>
               </a:ext>
             </a:extLst>
           </p:cNvPr>
@@ -2170,7 +2170,7 @@
           <p:cNvPr id="8" name="">
             <a:extLst xmlns:a="http://schemas.openxmlformats.org/drawingml/2006/main">
               <a:ext uri="{FF2B5EF4-FFF2-40B4-BE49-F238E27FC236}">
-                <a16:creationId xmlns:a16="http://schemas.microsoft.com/office/drawing/2014/main" id="{1B9C0B6B-7F32-4A95-A5C8-54BB6F263D74}"/>
+                <a16:creationId xmlns:a16="http://schemas.microsoft.com/office/drawing/2014/main" id="{126ECE6E-25D6-4BA8-AD60-3899505AFC59}"/>
               </a:ext>
             </a:extLst>
           </p:cNvPr>
@@ -2227,7 +2227,7 @@
           <p:cNvPr id="9" name="">
             <a:extLst xmlns:a="http://schemas.openxmlformats.org/drawingml/2006/main">
               <a:ext uri="{FF2B5EF4-FFF2-40B4-BE49-F238E27FC236}">
-                <a16:creationId xmlns:a16="http://schemas.microsoft.com/office/drawing/2014/main" id="{2C8B8D6B-6A83-4933-A8CF-3513FD31C4BC}"/>
+                <a16:creationId xmlns:a16="http://schemas.microsoft.com/office/drawing/2014/main" id="{226BD589-4DF3-46F8-9836-3CACDB31EA12}"/>
               </a:ext>
             </a:extLst>
           </p:cNvPr>
@@ -2284,7 +2284,7 @@
           <p:cNvPr id="10" name="">
             <a:extLst xmlns:a="http://schemas.openxmlformats.org/drawingml/2006/main">
               <a:ext uri="{FF2B5EF4-FFF2-40B4-BE49-F238E27FC236}">
-                <a16:creationId xmlns:a16="http://schemas.microsoft.com/office/drawing/2014/main" id="{B25B82BA-7459-4D6F-B2FD-1A2656F9D312}"/>
+                <a16:creationId xmlns:a16="http://schemas.microsoft.com/office/drawing/2014/main" id="{2C75ABF7-8038-4A0C-9CB6-33D5CE84FD43}"/>
               </a:ext>
             </a:extLst>
           </p:cNvPr>
@@ -2341,7 +2341,7 @@
           <p:cNvPr id="11" name="">
             <a:extLst xmlns:a="http://schemas.openxmlformats.org/drawingml/2006/main">
               <a:ext uri="{FF2B5EF4-FFF2-40B4-BE49-F238E27FC236}">
-                <a16:creationId xmlns:a16="http://schemas.microsoft.com/office/drawing/2014/main" id="{22E618CC-650A-4B2C-B34D-847B0E34BD3A}"/>
+                <a16:creationId xmlns:a16="http://schemas.microsoft.com/office/drawing/2014/main" id="{DD9535D8-9D88-4F6A-97FD-2B4F4CDB8974}"/>
               </a:ext>
             </a:extLst>
           </p:cNvPr>
@@ -2396,7 +2396,7 @@
     </p:spTree>
     <p:extLst>
       <p:ext uri="{BB962C8B-B14F-4D97-AF65-F5344CB8AC3E}">
-        <p14:creationId xmlns:p14="http://schemas.microsoft.com/office/powerpoint/2010/main" val="901554939"/>
+        <p14:creationId xmlns:p14="http://schemas.microsoft.com/office/powerpoint/2010/main" val="188429446"/>
       </p:ext>
     </p:extLst>
   </p:cSld>
@@ -2427,7 +2427,7 @@
           <p:cNvPr id="14" name="">
             <a:extLst xmlns:a="http://schemas.openxmlformats.org/drawingml/2006/main">
               <a:ext uri="{FF2B5EF4-FFF2-40B4-BE49-F238E27FC236}">
-                <a16:creationId xmlns:a16="http://schemas.microsoft.com/office/drawing/2014/main" id="{25634CC8-5AEA-4A85-BFEF-25757F41ACEA}"/>
+                <a16:creationId xmlns:a16="http://schemas.microsoft.com/office/drawing/2014/main" id="{9FAE98D3-38B9-476E-988C-66291A124E2C}"/>
               </a:ext>
             </a:extLst>
           </p:cNvPr>
@@ -2459,7 +2459,7 @@
           <p:cNvPr id="2" name="">
             <a:extLst xmlns:a="http://schemas.openxmlformats.org/drawingml/2006/main">
               <a:ext uri="{FF2B5EF4-FFF2-40B4-BE49-F238E27FC236}">
-                <a16:creationId xmlns:a16="http://schemas.microsoft.com/office/drawing/2014/main" id="{D9B8F1F5-BF42-4DDE-9DCD-CBC53826B2CA}"/>
+                <a16:creationId xmlns:a16="http://schemas.microsoft.com/office/drawing/2014/main" id="{7C88FB48-7241-46BA-8D5C-0DAEF1589C2A}"/>
               </a:ext>
             </a:extLst>
           </p:cNvPr>
@@ -2516,7 +2516,7 @@
           <p:cNvPr id="3" name="">
             <a:extLst xmlns:a="http://schemas.openxmlformats.org/drawingml/2006/main">
               <a:ext uri="{FF2B5EF4-FFF2-40B4-BE49-F238E27FC236}">
-                <a16:creationId xmlns:a16="http://schemas.microsoft.com/office/drawing/2014/main" id="{A48A4FBA-234A-4AA1-8180-929EEA9F6361}"/>
+                <a16:creationId xmlns:a16="http://schemas.microsoft.com/office/drawing/2014/main" id="{A35F9401-BADE-478F-86FF-3036C02E2064}"/>
               </a:ext>
             </a:extLst>
           </p:cNvPr>
@@ -2548,7 +2548,7 @@
           <p:cNvPr id="4" name="">
             <a:extLst xmlns:a="http://schemas.openxmlformats.org/drawingml/2006/main">
               <a:ext uri="{FF2B5EF4-FFF2-40B4-BE49-F238E27FC236}">
-                <a16:creationId xmlns:a16="http://schemas.microsoft.com/office/drawing/2014/main" id="{0499B86C-2A63-43B8-9220-E19DB31E2473}"/>
+                <a16:creationId xmlns:a16="http://schemas.microsoft.com/office/drawing/2014/main" id="{6D338C2D-95A2-40BE-9CC1-277C62427531}"/>
               </a:ext>
             </a:extLst>
           </p:cNvPr>
@@ -2605,7 +2605,7 @@
           <p:cNvPr id="5" name="">
             <a:extLst xmlns:a="http://schemas.openxmlformats.org/drawingml/2006/main">
               <a:ext uri="{FF2B5EF4-FFF2-40B4-BE49-F238E27FC236}">
-                <a16:creationId xmlns:a16="http://schemas.microsoft.com/office/drawing/2014/main" id="{A48870A2-41CB-4CAF-9CAF-FB6733F71B4A}"/>
+                <a16:creationId xmlns:a16="http://schemas.microsoft.com/office/drawing/2014/main" id="{7B1E338A-F8F5-4494-B686-0BB3A67DAE1E}"/>
               </a:ext>
             </a:extLst>
           </p:cNvPr>
@@ -2662,7 +2662,7 @@
           <p:cNvPr id="6" name="">
             <a:extLst xmlns:a="http://schemas.openxmlformats.org/drawingml/2006/main">
               <a:ext uri="{FF2B5EF4-FFF2-40B4-BE49-F238E27FC236}">
-                <a16:creationId xmlns:a16="http://schemas.microsoft.com/office/drawing/2014/main" id="{AAA741FD-1105-4950-8099-990F92034438}"/>
+                <a16:creationId xmlns:a16="http://schemas.microsoft.com/office/drawing/2014/main" id="{50E34451-0FE0-4536-BF67-245F015B227A}"/>
               </a:ext>
             </a:extLst>
           </p:cNvPr>
@@ -2719,7 +2719,7 @@
           <p:cNvPr id="7" name="">
             <a:extLst xmlns:a="http://schemas.openxmlformats.org/drawingml/2006/main">
               <a:ext uri="{FF2B5EF4-FFF2-40B4-BE49-F238E27FC236}">
-                <a16:creationId xmlns:a16="http://schemas.microsoft.com/office/drawing/2014/main" id="{9AC37C98-B6EC-4F2D-8DAD-FCB4061935A8}"/>
+                <a16:creationId xmlns:a16="http://schemas.microsoft.com/office/drawing/2014/main" id="{5ADDC554-C761-4B0A-B47D-15E7A91375D0}"/>
               </a:ext>
             </a:extLst>
           </p:cNvPr>
@@ -2751,7 +2751,7 @@
           <p:cNvPr id="8" name="">
             <a:extLst xmlns:a="http://schemas.openxmlformats.org/drawingml/2006/main">
               <a:ext uri="{FF2B5EF4-FFF2-40B4-BE49-F238E27FC236}">
-                <a16:creationId xmlns:a16="http://schemas.microsoft.com/office/drawing/2014/main" id="{DF6F66F6-00B6-4D1A-B6CA-DF11BCE1E5D9}"/>
+                <a16:creationId xmlns:a16="http://schemas.microsoft.com/office/drawing/2014/main" id="{29E25565-5A76-464C-9114-CA4E18020DDD}"/>
               </a:ext>
             </a:extLst>
           </p:cNvPr>
@@ -2808,7 +2808,7 @@
           <p:cNvPr id="9" name="">
             <a:extLst xmlns:a="http://schemas.openxmlformats.org/drawingml/2006/main">
               <a:ext uri="{FF2B5EF4-FFF2-40B4-BE49-F238E27FC236}">
-                <a16:creationId xmlns:a16="http://schemas.microsoft.com/office/drawing/2014/main" id="{71E9FA62-A0C3-4800-BFAB-332E164B9215}"/>
+                <a16:creationId xmlns:a16="http://schemas.microsoft.com/office/drawing/2014/main" id="{2A3017FE-1639-4FE0-BCA3-E3ED65B34C74}"/>
               </a:ext>
             </a:extLst>
           </p:cNvPr>
@@ -2865,7 +2865,7 @@
           <p:cNvPr id="10" name="">
             <a:extLst xmlns:a="http://schemas.openxmlformats.org/drawingml/2006/main">
               <a:ext uri="{FF2B5EF4-FFF2-40B4-BE49-F238E27FC236}">
-                <a16:creationId xmlns:a16="http://schemas.microsoft.com/office/drawing/2014/main" id="{B9F00179-4909-497B-9D31-0FCCF214F06E}"/>
+                <a16:creationId xmlns:a16="http://schemas.microsoft.com/office/drawing/2014/main" id="{ED60A6B5-94A2-4914-8D96-C4031034A00C}"/>
               </a:ext>
             </a:extLst>
           </p:cNvPr>
@@ -2922,7 +2922,7 @@
           <p:cNvPr id="11" name="">
             <a:extLst xmlns:a="http://schemas.openxmlformats.org/drawingml/2006/main">
               <a:ext uri="{FF2B5EF4-FFF2-40B4-BE49-F238E27FC236}">
-                <a16:creationId xmlns:a16="http://schemas.microsoft.com/office/drawing/2014/main" id="{B615A9F3-A89C-4B12-9E08-6B1DDD15896C}"/>
+                <a16:creationId xmlns:a16="http://schemas.microsoft.com/office/drawing/2014/main" id="{61F97313-D106-46B1-BAD7-B7B03BA49E1C}"/>
               </a:ext>
             </a:extLst>
           </p:cNvPr>
@@ -2979,7 +2979,7 @@
           <p:cNvPr id="12" name="">
             <a:extLst xmlns:a="http://schemas.openxmlformats.org/drawingml/2006/main">
               <a:ext uri="{FF2B5EF4-FFF2-40B4-BE49-F238E27FC236}">
-                <a16:creationId xmlns:a16="http://schemas.microsoft.com/office/drawing/2014/main" id="{5EAFED92-2951-4A5A-B360-0486042AAA3B}"/>
+                <a16:creationId xmlns:a16="http://schemas.microsoft.com/office/drawing/2014/main" id="{D1DD382D-CD22-47BC-AAE1-C59EC33EABDE}"/>
               </a:ext>
             </a:extLst>
           </p:cNvPr>
@@ -3036,7 +3036,7 @@
           <p:cNvPr id="13" name="">
             <a:extLst xmlns:a="http://schemas.openxmlformats.org/drawingml/2006/main">
               <a:ext uri="{FF2B5EF4-FFF2-40B4-BE49-F238E27FC236}">
-                <a16:creationId xmlns:a16="http://schemas.microsoft.com/office/drawing/2014/main" id="{1FD2D4A1-5159-4C6C-AAA3-C777A7860D66}"/>
+                <a16:creationId xmlns:a16="http://schemas.microsoft.com/office/drawing/2014/main" id="{A7CC747E-FCEB-4175-A08A-228DEA0E106B}"/>
               </a:ext>
             </a:extLst>
           </p:cNvPr>
@@ -3091,7 +3091,7 @@
     </p:spTree>
     <p:extLst>
       <p:ext uri="{BB962C8B-B14F-4D97-AF65-F5344CB8AC3E}">
-        <p14:creationId xmlns:p14="http://schemas.microsoft.com/office/powerpoint/2010/main" val="725217071"/>
+        <p14:creationId xmlns:p14="http://schemas.microsoft.com/office/powerpoint/2010/main" val="1114118836"/>
       </p:ext>
     </p:extLst>
   </p:cSld>
@@ -3292,7 +3292,7 @@
           <p:cNvPr id="19" name="">
             <a:extLst xmlns:a="http://schemas.openxmlformats.org/drawingml/2006/main">
               <a:ext uri="{FF2B5EF4-FFF2-40B4-BE49-F238E27FC236}">
-                <a16:creationId xmlns:a16="http://schemas.microsoft.com/office/drawing/2014/main" id="{BFCE3C1B-5B9C-4E4C-B2C9-C857853AD454}"/>
+                <a16:creationId xmlns:a16="http://schemas.microsoft.com/office/drawing/2014/main" id="{62C2120A-A832-4DB1-A5BC-BD94B0AF7C85}"/>
               </a:ext>
             </a:extLst>
           </p:cNvPr>
@@ -3324,7 +3324,7 @@
           <p:cNvPr id="2" name="">
             <a:extLst xmlns:a="http://schemas.openxmlformats.org/drawingml/2006/main">
               <a:ext uri="{FF2B5EF4-FFF2-40B4-BE49-F238E27FC236}">
-                <a16:creationId xmlns:a16="http://schemas.microsoft.com/office/drawing/2014/main" id="{8D31447A-94BA-44CA-A846-E998875370D2}"/>
+                <a16:creationId xmlns:a16="http://schemas.microsoft.com/office/drawing/2014/main" id="{99E3FCBA-FF54-4BC9-8425-2323D57ADB57}"/>
               </a:ext>
             </a:extLst>
           </p:cNvPr>
@@ -3381,7 +3381,7 @@
           <p:cNvPr id="3" name="">
             <a:extLst xmlns:a="http://schemas.openxmlformats.org/drawingml/2006/main">
               <a:ext uri="{FF2B5EF4-FFF2-40B4-BE49-F238E27FC236}">
-                <a16:creationId xmlns:a16="http://schemas.microsoft.com/office/drawing/2014/main" id="{227EB286-D4AC-4D05-8448-CE8984449BB9}"/>
+                <a16:creationId xmlns:a16="http://schemas.microsoft.com/office/drawing/2014/main" id="{D2017709-0DF1-4563-BC64-43CF672DEAF6}"/>
               </a:ext>
             </a:extLst>
           </p:cNvPr>
@@ -3413,7 +3413,7 @@
           <p:cNvPr id="4" name="">
             <a:extLst xmlns:a="http://schemas.openxmlformats.org/drawingml/2006/main">
               <a:ext uri="{FF2B5EF4-FFF2-40B4-BE49-F238E27FC236}">
-                <a16:creationId xmlns:a16="http://schemas.microsoft.com/office/drawing/2014/main" id="{5B2F0A67-1D76-43CA-94CB-FE05FCB1DB88}"/>
+                <a16:creationId xmlns:a16="http://schemas.microsoft.com/office/drawing/2014/main" id="{DF53A112-BD13-4121-8817-EE5E2D7E4A14}"/>
               </a:ext>
             </a:extLst>
           </p:cNvPr>
@@ -3470,7 +3470,7 @@
           <p:cNvPr id="5" name="">
             <a:extLst xmlns:a="http://schemas.openxmlformats.org/drawingml/2006/main">
               <a:ext uri="{FF2B5EF4-FFF2-40B4-BE49-F238E27FC236}">
-                <a16:creationId xmlns:a16="http://schemas.microsoft.com/office/drawing/2014/main" id="{CBF2AA4D-4015-4462-98DB-7BB2D4449A9F}"/>
+                <a16:creationId xmlns:a16="http://schemas.microsoft.com/office/drawing/2014/main" id="{BD143564-9663-4BD3-A2F1-174FFFEF7819}"/>
               </a:ext>
             </a:extLst>
           </p:cNvPr>
@@ -3527,7 +3527,7 @@
           <p:cNvPr id="6" name="">
             <a:extLst xmlns:a="http://schemas.openxmlformats.org/drawingml/2006/main">
               <a:ext uri="{FF2B5EF4-FFF2-40B4-BE49-F238E27FC236}">
-                <a16:creationId xmlns:a16="http://schemas.microsoft.com/office/drawing/2014/main" id="{00404CE2-F53B-42E2-87AD-9947B7875F67}"/>
+                <a16:creationId xmlns:a16="http://schemas.microsoft.com/office/drawing/2014/main" id="{50E678A3-D806-4811-8E13-D837924676B0}"/>
               </a:ext>
             </a:extLst>
           </p:cNvPr>
@@ -3584,7 +3584,7 @@
           <p:cNvPr id="7" name="">
             <a:extLst xmlns:a="http://schemas.openxmlformats.org/drawingml/2006/main">
               <a:ext uri="{FF2B5EF4-FFF2-40B4-BE49-F238E27FC236}">
-                <a16:creationId xmlns:a16="http://schemas.microsoft.com/office/drawing/2014/main" id="{7694326F-D100-4EE0-9D44-E5A8F4D5FD57}"/>
+                <a16:creationId xmlns:a16="http://schemas.microsoft.com/office/drawing/2014/main" id="{45D0A417-4037-465F-BD91-E9DCD468E364}"/>
               </a:ext>
             </a:extLst>
           </p:cNvPr>
@@ -3616,7 +3616,7 @@
           <p:cNvPr id="8" name="">
             <a:extLst xmlns:a="http://schemas.openxmlformats.org/drawingml/2006/main">
               <a:ext uri="{FF2B5EF4-FFF2-40B4-BE49-F238E27FC236}">
-                <a16:creationId xmlns:a16="http://schemas.microsoft.com/office/drawing/2014/main" id="{E4AE6C76-1ECF-4AF7-8512-929756D83C5E}"/>
+                <a16:creationId xmlns:a16="http://schemas.microsoft.com/office/drawing/2014/main" id="{E846211E-4C54-4232-99D5-41548A60E82A}"/>
               </a:ext>
             </a:extLst>
           </p:cNvPr>
@@ -3673,7 +3673,7 @@
           <p:cNvPr id="9" name="">
             <a:extLst xmlns:a="http://schemas.openxmlformats.org/drawingml/2006/main">
               <a:ext uri="{FF2B5EF4-FFF2-40B4-BE49-F238E27FC236}">
-                <a16:creationId xmlns:a16="http://schemas.microsoft.com/office/drawing/2014/main" id="{B8B9098C-6708-455E-8252-7A234F573DB3}"/>
+                <a16:creationId xmlns:a16="http://schemas.microsoft.com/office/drawing/2014/main" id="{8B6AC246-653F-4D11-BA76-4AED4D26CCD7}"/>
               </a:ext>
             </a:extLst>
           </p:cNvPr>
@@ -3730,7 +3730,7 @@
           <p:cNvPr id="10" name="">
             <a:extLst xmlns:a="http://schemas.openxmlformats.org/drawingml/2006/main">
               <a:ext uri="{FF2B5EF4-FFF2-40B4-BE49-F238E27FC236}">
-                <a16:creationId xmlns:a16="http://schemas.microsoft.com/office/drawing/2014/main" id="{9F0237AE-5F9D-4D11-A997-BB12096032DD}"/>
+                <a16:creationId xmlns:a16="http://schemas.microsoft.com/office/drawing/2014/main" id="{75FEA724-DB11-4466-86FA-930F87BEDFDF}"/>
               </a:ext>
             </a:extLst>
           </p:cNvPr>
@@ -3787,7 +3787,7 @@
           <p:cNvPr id="11" name="">
             <a:extLst xmlns:a="http://schemas.openxmlformats.org/drawingml/2006/main">
               <a:ext uri="{FF2B5EF4-FFF2-40B4-BE49-F238E27FC236}">
-                <a16:creationId xmlns:a16="http://schemas.microsoft.com/office/drawing/2014/main" id="{1E25CB0B-689E-4EA3-BDE1-5DAFB8083DCF}"/>
+                <a16:creationId xmlns:a16="http://schemas.microsoft.com/office/drawing/2014/main" id="{E536B6C0-E485-4539-8C2B-B0BB61D5D446}"/>
               </a:ext>
             </a:extLst>
           </p:cNvPr>
@@ -3821,7 +3821,7 @@
           <p:cNvPr id="12" name="">
             <a:extLst xmlns:a="http://schemas.openxmlformats.org/drawingml/2006/main">
               <a:ext uri="{FF2B5EF4-FFF2-40B4-BE49-F238E27FC236}">
-                <a16:creationId xmlns:a16="http://schemas.microsoft.com/office/drawing/2014/main" id="{70496CA4-337C-4F83-96AC-592C62DC019D}"/>
+                <a16:creationId xmlns:a16="http://schemas.microsoft.com/office/drawing/2014/main" id="{F94F2198-FC2E-4DFE-98FD-CFC53F155489}"/>
               </a:ext>
             </a:extLst>
           </p:cNvPr>
@@ -3878,7 +3878,7 @@
           <p:cNvPr id="13" name="">
             <a:extLst xmlns:a="http://schemas.openxmlformats.org/drawingml/2006/main">
               <a:ext uri="{FF2B5EF4-FFF2-40B4-BE49-F238E27FC236}">
-                <a16:creationId xmlns:a16="http://schemas.microsoft.com/office/drawing/2014/main" id="{1B0FB277-F6B2-419F-89D5-36B2CB36BBAD}"/>
+                <a16:creationId xmlns:a16="http://schemas.microsoft.com/office/drawing/2014/main" id="{7A9614DD-6615-48BF-BD7B-75BC1309079C}"/>
               </a:ext>
             </a:extLst>
           </p:cNvPr>
@@ -3935,7 +3935,7 @@
           <p:cNvPr id="14" name="">
             <a:extLst xmlns:a="http://schemas.openxmlformats.org/drawingml/2006/main">
               <a:ext uri="{FF2B5EF4-FFF2-40B4-BE49-F238E27FC236}">
-                <a16:creationId xmlns:a16="http://schemas.microsoft.com/office/drawing/2014/main" id="{4C8553BD-3EBF-46B1-BE9E-58D55E847900}"/>
+                <a16:creationId xmlns:a16="http://schemas.microsoft.com/office/drawing/2014/main" id="{B469C9EC-BD93-48DA-9AED-1BAD319192E7}"/>
               </a:ext>
             </a:extLst>
           </p:cNvPr>
@@ -3992,7 +3992,7 @@
           <p:cNvPr id="15" name="">
             <a:extLst xmlns:a="http://schemas.openxmlformats.org/drawingml/2006/main">
               <a:ext uri="{FF2B5EF4-FFF2-40B4-BE49-F238E27FC236}">
-                <a16:creationId xmlns:a16="http://schemas.microsoft.com/office/drawing/2014/main" id="{36A787D8-D192-441C-AADE-0602A03291D3}"/>
+                <a16:creationId xmlns:a16="http://schemas.microsoft.com/office/drawing/2014/main" id="{2B0B6C29-DFB0-420D-9477-778E5BB3C4EB}"/>
               </a:ext>
             </a:extLst>
           </p:cNvPr>
@@ -4026,7 +4026,7 @@
           <p:cNvPr id="16" name="">
             <a:extLst xmlns:a="http://schemas.openxmlformats.org/drawingml/2006/main">
               <a:ext uri="{FF2B5EF4-FFF2-40B4-BE49-F238E27FC236}">
-                <a16:creationId xmlns:a16="http://schemas.microsoft.com/office/drawing/2014/main" id="{8630F759-C873-4FE8-A7C7-7AC3FBD7FCF8}"/>
+                <a16:creationId xmlns:a16="http://schemas.microsoft.com/office/drawing/2014/main" id="{A9C1C458-9C01-41D4-97A8-216A75624876}"/>
               </a:ext>
             </a:extLst>
           </p:cNvPr>
@@ -4083,7 +4083,7 @@
           <p:cNvPr id="17" name="">
             <a:extLst xmlns:a="http://schemas.openxmlformats.org/drawingml/2006/main">
               <a:ext uri="{FF2B5EF4-FFF2-40B4-BE49-F238E27FC236}">
-                <a16:creationId xmlns:a16="http://schemas.microsoft.com/office/drawing/2014/main" id="{99FB06DD-7774-4BB7-BA37-F5E0CF2E4633}"/>
+                <a16:creationId xmlns:a16="http://schemas.microsoft.com/office/drawing/2014/main" id="{3911A913-F8E7-4447-AE4A-E98FBEBCD0CF}"/>
               </a:ext>
             </a:extLst>
           </p:cNvPr>
@@ -4140,7 +4140,7 @@
           <p:cNvPr id="18" name="">
             <a:extLst xmlns:a="http://schemas.openxmlformats.org/drawingml/2006/main">
               <a:ext uri="{FF2B5EF4-FFF2-40B4-BE49-F238E27FC236}">
-                <a16:creationId xmlns:a16="http://schemas.microsoft.com/office/drawing/2014/main" id="{238C8FCC-F01A-4A9F-9EDA-EEAAF0AA5CFF}"/>
+                <a16:creationId xmlns:a16="http://schemas.microsoft.com/office/drawing/2014/main" id="{77C9616C-4411-4078-BE6E-E143DCB04E38}"/>
               </a:ext>
             </a:extLst>
           </p:cNvPr>
@@ -4195,7 +4195,7 @@
     </p:spTree>
     <p:extLst>
       <p:ext uri="{BB962C8B-B14F-4D97-AF65-F5344CB8AC3E}">
-        <p14:creationId xmlns:p14="http://schemas.microsoft.com/office/powerpoint/2010/main" val="2132667400"/>
+        <p14:creationId xmlns:p14="http://schemas.microsoft.com/office/powerpoint/2010/main" val="229034187"/>
       </p:ext>
     </p:extLst>
   </p:cSld>
@@ -4350,7 +4350,7 @@
           <p:cNvPr id="23" name="">
             <a:extLst xmlns:a="http://schemas.openxmlformats.org/drawingml/2006/main">
               <a:ext uri="{FF2B5EF4-FFF2-40B4-BE49-F238E27FC236}">
-                <a16:creationId xmlns:a16="http://schemas.microsoft.com/office/drawing/2014/main" id="{C0C6EE51-884B-4DF2-8646-184FE4267D51}"/>
+                <a16:creationId xmlns:a16="http://schemas.microsoft.com/office/drawing/2014/main" id="{FE6C9187-CA3E-47B6-8B90-B493BBA97F58}"/>
               </a:ext>
             </a:extLst>
           </p:cNvPr>
@@ -4382,7 +4382,7 @@
           <p:cNvPr id="2" name="">
             <a:extLst xmlns:a="http://schemas.openxmlformats.org/drawingml/2006/main">
               <a:ext uri="{FF2B5EF4-FFF2-40B4-BE49-F238E27FC236}">
-                <a16:creationId xmlns:a16="http://schemas.microsoft.com/office/drawing/2014/main" id="{5E10E5F2-2793-41EE-AB56-64F53227485C}"/>
+                <a16:creationId xmlns:a16="http://schemas.microsoft.com/office/drawing/2014/main" id="{68108580-95EE-4261-88F2-2E9CA3E25DF8}"/>
               </a:ext>
             </a:extLst>
           </p:cNvPr>
@@ -4439,7 +4439,7 @@
           <p:cNvPr id="3" name="">
             <a:extLst xmlns:a="http://schemas.openxmlformats.org/drawingml/2006/main">
               <a:ext uri="{FF2B5EF4-FFF2-40B4-BE49-F238E27FC236}">
-                <a16:creationId xmlns:a16="http://schemas.microsoft.com/office/drawing/2014/main" id="{A05111D1-AB14-4800-B7DC-08DC766CF540}"/>
+                <a16:creationId xmlns:a16="http://schemas.microsoft.com/office/drawing/2014/main" id="{ED93D0B0-7683-48A2-8402-0A4E267253F1}"/>
               </a:ext>
             </a:extLst>
           </p:cNvPr>
@@ -4471,7 +4471,7 @@
           <p:cNvPr id="4" name="">
             <a:extLst xmlns:a="http://schemas.openxmlformats.org/drawingml/2006/main">
               <a:ext uri="{FF2B5EF4-FFF2-40B4-BE49-F238E27FC236}">
-                <a16:creationId xmlns:a16="http://schemas.microsoft.com/office/drawing/2014/main" id="{3E6100C6-66F3-4464-B00F-21273F21EBB4}"/>
+                <a16:creationId xmlns:a16="http://schemas.microsoft.com/office/drawing/2014/main" id="{9A7C2A89-1EC7-49CA-885B-8569DEFDF22F}"/>
               </a:ext>
             </a:extLst>
           </p:cNvPr>
@@ -4528,7 +4528,7 @@
           <p:cNvPr id="5" name="">
             <a:extLst xmlns:a="http://schemas.openxmlformats.org/drawingml/2006/main">
               <a:ext uri="{FF2B5EF4-FFF2-40B4-BE49-F238E27FC236}">
-                <a16:creationId xmlns:a16="http://schemas.microsoft.com/office/drawing/2014/main" id="{BADFDBD2-11E5-4D9B-B918-B7B6FCE35DB7}"/>
+                <a16:creationId xmlns:a16="http://schemas.microsoft.com/office/drawing/2014/main" id="{ADD02AA9-DB1E-4F2A-A9F8-057718F10E78}"/>
               </a:ext>
             </a:extLst>
           </p:cNvPr>
@@ -4585,7 +4585,7 @@
           <p:cNvPr id="6" name="">
             <a:extLst xmlns:a="http://schemas.openxmlformats.org/drawingml/2006/main">
               <a:ext uri="{FF2B5EF4-FFF2-40B4-BE49-F238E27FC236}">
-                <a16:creationId xmlns:a16="http://schemas.microsoft.com/office/drawing/2014/main" id="{5406413F-30DC-4BCC-9F45-AB6EE9187396}"/>
+                <a16:creationId xmlns:a16="http://schemas.microsoft.com/office/drawing/2014/main" id="{5280E9B2-A0C4-4111-9158-E3757710C5A2}"/>
               </a:ext>
             </a:extLst>
           </p:cNvPr>
@@ -4642,7 +4642,7 @@
           <p:cNvPr id="7" name="">
             <a:extLst xmlns:a="http://schemas.openxmlformats.org/drawingml/2006/main">
               <a:ext uri="{FF2B5EF4-FFF2-40B4-BE49-F238E27FC236}">
-                <a16:creationId xmlns:a16="http://schemas.microsoft.com/office/drawing/2014/main" id="{41EB4742-F3F9-4BF1-B625-B3585DB7322D}"/>
+                <a16:creationId xmlns:a16="http://schemas.microsoft.com/office/drawing/2014/main" id="{1183042D-1C48-430C-9BFE-0B12E03B7817}"/>
               </a:ext>
             </a:extLst>
           </p:cNvPr>
@@ -4674,7 +4674,7 @@
           <p:cNvPr id="8" name="">
             <a:extLst xmlns:a="http://schemas.openxmlformats.org/drawingml/2006/main">
               <a:ext uri="{FF2B5EF4-FFF2-40B4-BE49-F238E27FC236}">
-                <a16:creationId xmlns:a16="http://schemas.microsoft.com/office/drawing/2014/main" id="{FD297291-51FA-4298-81D4-C2CC32FD40A8}"/>
+                <a16:creationId xmlns:a16="http://schemas.microsoft.com/office/drawing/2014/main" id="{47AC6A86-1C5D-478F-A370-DB6D3CD694E7}"/>
               </a:ext>
             </a:extLst>
           </p:cNvPr>
@@ -4731,7 +4731,7 @@
           <p:cNvPr id="9" name="">
             <a:extLst xmlns:a="http://schemas.openxmlformats.org/drawingml/2006/main">
               <a:ext uri="{FF2B5EF4-FFF2-40B4-BE49-F238E27FC236}">
-                <a16:creationId xmlns:a16="http://schemas.microsoft.com/office/drawing/2014/main" id="{76C308C2-B019-461B-993E-620B111A62D3}"/>
+                <a16:creationId xmlns:a16="http://schemas.microsoft.com/office/drawing/2014/main" id="{8416C882-58F2-4740-943D-E5FC833B9BE0}"/>
               </a:ext>
             </a:extLst>
           </p:cNvPr>
@@ -4788,7 +4788,7 @@
           <p:cNvPr id="10" name="">
             <a:extLst xmlns:a="http://schemas.openxmlformats.org/drawingml/2006/main">
               <a:ext uri="{FF2B5EF4-FFF2-40B4-BE49-F238E27FC236}">
-                <a16:creationId xmlns:a16="http://schemas.microsoft.com/office/drawing/2014/main" id="{6BC47BF3-CDD8-4055-8546-CA82C038555D}"/>
+                <a16:creationId xmlns:a16="http://schemas.microsoft.com/office/drawing/2014/main" id="{AC9BD290-D8B4-4DE6-AE28-5A5440BF3B31}"/>
               </a:ext>
             </a:extLst>
           </p:cNvPr>
@@ -4822,7 +4822,7 @@
           <p:cNvPr id="11" name="">
             <a:extLst xmlns:a="http://schemas.openxmlformats.org/drawingml/2006/main">
               <a:ext uri="{FF2B5EF4-FFF2-40B4-BE49-F238E27FC236}">
-                <a16:creationId xmlns:a16="http://schemas.microsoft.com/office/drawing/2014/main" id="{70978157-8889-4091-87D9-BCF9450CAF49}"/>
+                <a16:creationId xmlns:a16="http://schemas.microsoft.com/office/drawing/2014/main" id="{8FFAA14C-1E7C-48C9-AFB5-49BB1283281F}"/>
               </a:ext>
             </a:extLst>
           </p:cNvPr>
@@ -4854,7 +4854,7 @@
           <p:cNvPr id="12" name="">
             <a:extLst xmlns:a="http://schemas.openxmlformats.org/drawingml/2006/main">
               <a:ext uri="{FF2B5EF4-FFF2-40B4-BE49-F238E27FC236}">
-                <a16:creationId xmlns:a16="http://schemas.microsoft.com/office/drawing/2014/main" id="{5A5FA186-999E-4B7E-91C5-161481C78701}"/>
+                <a16:creationId xmlns:a16="http://schemas.microsoft.com/office/drawing/2014/main" id="{8D1C0992-4391-4084-A2A9-62C4CAF799FD}"/>
               </a:ext>
             </a:extLst>
           </p:cNvPr>
@@ -4911,7 +4911,7 @@
           <p:cNvPr id="13" name="">
             <a:extLst xmlns:a="http://schemas.openxmlformats.org/drawingml/2006/main">
               <a:ext uri="{FF2B5EF4-FFF2-40B4-BE49-F238E27FC236}">
-                <a16:creationId xmlns:a16="http://schemas.microsoft.com/office/drawing/2014/main" id="{830D53D3-B855-4C2F-B1C4-8811648D5A22}"/>
+                <a16:creationId xmlns:a16="http://schemas.microsoft.com/office/drawing/2014/main" id="{35C72510-E035-4D3F-9DB4-C2F275FBAADC}"/>
               </a:ext>
             </a:extLst>
           </p:cNvPr>
@@ -4968,7 +4968,7 @@
           <p:cNvPr id="14" name="">
             <a:extLst xmlns:a="http://schemas.openxmlformats.org/drawingml/2006/main">
               <a:ext uri="{FF2B5EF4-FFF2-40B4-BE49-F238E27FC236}">
-                <a16:creationId xmlns:a16="http://schemas.microsoft.com/office/drawing/2014/main" id="{40981A66-F701-40F2-A6EA-5E4C6E96EB69}"/>
+                <a16:creationId xmlns:a16="http://schemas.microsoft.com/office/drawing/2014/main" id="{2C2842F6-C04A-402C-AAE0-E80853167123}"/>
               </a:ext>
             </a:extLst>
           </p:cNvPr>
@@ -5002,7 +5002,7 @@
           <p:cNvPr id="15" name="">
             <a:extLst xmlns:a="http://schemas.openxmlformats.org/drawingml/2006/main">
               <a:ext uri="{FF2B5EF4-FFF2-40B4-BE49-F238E27FC236}">
-                <a16:creationId xmlns:a16="http://schemas.microsoft.com/office/drawing/2014/main" id="{06423226-3A6C-45F9-8467-D0FE8203003D}"/>
+                <a16:creationId xmlns:a16="http://schemas.microsoft.com/office/drawing/2014/main" id="{2BA1E650-5F53-460F-B992-898804BF22F4}"/>
               </a:ext>
             </a:extLst>
           </p:cNvPr>
@@ -5034,7 +5034,7 @@
           <p:cNvPr id="16" name="">
             <a:extLst xmlns:a="http://schemas.openxmlformats.org/drawingml/2006/main">
               <a:ext uri="{FF2B5EF4-FFF2-40B4-BE49-F238E27FC236}">
-                <a16:creationId xmlns:a16="http://schemas.microsoft.com/office/drawing/2014/main" id="{D22BD091-EADD-4B14-BCB1-F27CBC862571}"/>
+                <a16:creationId xmlns:a16="http://schemas.microsoft.com/office/drawing/2014/main" id="{C7EA06D0-BB29-4A52-BDDB-9AD7527A0348}"/>
               </a:ext>
             </a:extLst>
           </p:cNvPr>
@@ -5091,7 +5091,7 @@
           <p:cNvPr id="17" name="">
             <a:extLst xmlns:a="http://schemas.openxmlformats.org/drawingml/2006/main">
               <a:ext uri="{FF2B5EF4-FFF2-40B4-BE49-F238E27FC236}">
-                <a16:creationId xmlns:a16="http://schemas.microsoft.com/office/drawing/2014/main" id="{A14A1911-EF5E-42EE-8868-A0C25D7CF8B3}"/>
+                <a16:creationId xmlns:a16="http://schemas.microsoft.com/office/drawing/2014/main" id="{65F9565D-1288-4805-8570-C11E45B13C7B}"/>
               </a:ext>
             </a:extLst>
           </p:cNvPr>
@@ -5148,7 +5148,7 @@
           <p:cNvPr id="18" name="">
             <a:extLst xmlns:a="http://schemas.openxmlformats.org/drawingml/2006/main">
               <a:ext uri="{FF2B5EF4-FFF2-40B4-BE49-F238E27FC236}">
-                <a16:creationId xmlns:a16="http://schemas.microsoft.com/office/drawing/2014/main" id="{B738DB5E-EFE7-4A09-B575-408769266C3B}"/>
+                <a16:creationId xmlns:a16="http://schemas.microsoft.com/office/drawing/2014/main" id="{C6E803BF-C0A5-4F94-8536-55AC64603F9B}"/>
               </a:ext>
             </a:extLst>
           </p:cNvPr>
@@ -5182,7 +5182,7 @@
           <p:cNvPr id="19" name="">
             <a:extLst xmlns:a="http://schemas.openxmlformats.org/drawingml/2006/main">
               <a:ext uri="{FF2B5EF4-FFF2-40B4-BE49-F238E27FC236}">
-                <a16:creationId xmlns:a16="http://schemas.microsoft.com/office/drawing/2014/main" id="{AFFB0D9A-ABE3-40C3-8F2B-7AFF84F18A2F}"/>
+                <a16:creationId xmlns:a16="http://schemas.microsoft.com/office/drawing/2014/main" id="{4437C06F-F963-4E1C-AD04-A177FADBE253}"/>
               </a:ext>
             </a:extLst>
           </p:cNvPr>
@@ -5214,7 +5214,7 @@
           <p:cNvPr id="20" name="">
             <a:extLst xmlns:a="http://schemas.openxmlformats.org/drawingml/2006/main">
               <a:ext uri="{FF2B5EF4-FFF2-40B4-BE49-F238E27FC236}">
-                <a16:creationId xmlns:a16="http://schemas.microsoft.com/office/drawing/2014/main" id="{A276AA00-2F5C-420C-BB76-8CFC0E613768}"/>
+                <a16:creationId xmlns:a16="http://schemas.microsoft.com/office/drawing/2014/main" id="{C319C4B1-1E1B-4218-9F38-59E5940B7812}"/>
               </a:ext>
             </a:extLst>
           </p:cNvPr>
@@ -5271,7 +5271,7 @@
           <p:cNvPr id="21" name="">
             <a:extLst xmlns:a="http://schemas.openxmlformats.org/drawingml/2006/main">
               <a:ext uri="{FF2B5EF4-FFF2-40B4-BE49-F238E27FC236}">
-                <a16:creationId xmlns:a16="http://schemas.microsoft.com/office/drawing/2014/main" id="{BC7CE013-0ABE-4E50-A23E-E67F72B411D6}"/>
+                <a16:creationId xmlns:a16="http://schemas.microsoft.com/office/drawing/2014/main" id="{D2181F5C-0820-4BD7-AAF6-34905A1D8D77}"/>
               </a:ext>
             </a:extLst>
           </p:cNvPr>
@@ -5328,7 +5328,7 @@
           <p:cNvPr id="22" name="">
             <a:extLst xmlns:a="http://schemas.openxmlformats.org/drawingml/2006/main">
               <a:ext uri="{FF2B5EF4-FFF2-40B4-BE49-F238E27FC236}">
-                <a16:creationId xmlns:a16="http://schemas.microsoft.com/office/drawing/2014/main" id="{89126139-6C70-4143-88B6-6D25DFA253EB}"/>
+                <a16:creationId xmlns:a16="http://schemas.microsoft.com/office/drawing/2014/main" id="{C5FE929F-80D1-4321-9228-FEBBDB5DC26D}"/>
               </a:ext>
             </a:extLst>
           </p:cNvPr>
@@ -5383,7 +5383,7 @@
     </p:spTree>
     <p:extLst>
       <p:ext uri="{BB962C8B-B14F-4D97-AF65-F5344CB8AC3E}">
-        <p14:creationId xmlns:p14="http://schemas.microsoft.com/office/powerpoint/2010/main" val="551260137"/>
+        <p14:creationId xmlns:p14="http://schemas.microsoft.com/office/powerpoint/2010/main" val="1221735437"/>
       </p:ext>
     </p:extLst>
   </p:cSld>
@@ -5584,7 +5584,7 @@
           <p:cNvPr id="23" name="">
             <a:extLst xmlns:a="http://schemas.openxmlformats.org/drawingml/2006/main">
               <a:ext uri="{FF2B5EF4-FFF2-40B4-BE49-F238E27FC236}">
-                <a16:creationId xmlns:a16="http://schemas.microsoft.com/office/drawing/2014/main" id="{878EF774-B7D4-471F-86D0-59F2152569C4}"/>
+                <a16:creationId xmlns:a16="http://schemas.microsoft.com/office/drawing/2014/main" id="{D1C53FFD-D759-4699-AECE-DBAE9D55CBC8}"/>
               </a:ext>
             </a:extLst>
           </p:cNvPr>
@@ -5616,7 +5616,7 @@
           <p:cNvPr id="2" name="">
             <a:extLst xmlns:a="http://schemas.openxmlformats.org/drawingml/2006/main">
               <a:ext uri="{FF2B5EF4-FFF2-40B4-BE49-F238E27FC236}">
-                <a16:creationId xmlns:a16="http://schemas.microsoft.com/office/drawing/2014/main" id="{E26F9EBE-EEC7-4F1D-AA6C-F3FDDD88DB86}"/>
+                <a16:creationId xmlns:a16="http://schemas.microsoft.com/office/drawing/2014/main" id="{50CEFD07-3C49-4ABA-A99E-459984F4F1A4}"/>
               </a:ext>
             </a:extLst>
           </p:cNvPr>
@@ -5673,7 +5673,7 @@
           <p:cNvPr id="3" name="">
             <a:extLst xmlns:a="http://schemas.openxmlformats.org/drawingml/2006/main">
               <a:ext uri="{FF2B5EF4-FFF2-40B4-BE49-F238E27FC236}">
-                <a16:creationId xmlns:a16="http://schemas.microsoft.com/office/drawing/2014/main" id="{D4A8B1B9-0F67-431C-A0B6-158FE82F94C5}"/>
+                <a16:creationId xmlns:a16="http://schemas.microsoft.com/office/drawing/2014/main" id="{7FFF7C06-56D5-4D7D-97A8-777045FA1AA8}"/>
               </a:ext>
             </a:extLst>
           </p:cNvPr>
@@ -5705,7 +5705,7 @@
           <p:cNvPr id="4" name="">
             <a:extLst xmlns:a="http://schemas.openxmlformats.org/drawingml/2006/main">
               <a:ext uri="{FF2B5EF4-FFF2-40B4-BE49-F238E27FC236}">
-                <a16:creationId xmlns:a16="http://schemas.microsoft.com/office/drawing/2014/main" id="{92EB5B5B-0660-4653-85A7-AB2E2CBD47AF}"/>
+                <a16:creationId xmlns:a16="http://schemas.microsoft.com/office/drawing/2014/main" id="{8C9A7626-7A03-4322-8DF3-E9002C075C95}"/>
               </a:ext>
             </a:extLst>
           </p:cNvPr>
@@ -5762,7 +5762,7 @@
           <p:cNvPr id="5" name="">
             <a:extLst xmlns:a="http://schemas.openxmlformats.org/drawingml/2006/main">
               <a:ext uri="{FF2B5EF4-FFF2-40B4-BE49-F238E27FC236}">
-                <a16:creationId xmlns:a16="http://schemas.microsoft.com/office/drawing/2014/main" id="{2BE1F11F-391F-471F-AC94-3C75F9869831}"/>
+                <a16:creationId xmlns:a16="http://schemas.microsoft.com/office/drawing/2014/main" id="{9B76FA67-112D-41D6-85E5-D3AC4FD6E0BD}"/>
               </a:ext>
             </a:extLst>
           </p:cNvPr>
@@ -5819,7 +5819,7 @@
           <p:cNvPr id="6" name="">
             <a:extLst xmlns:a="http://schemas.openxmlformats.org/drawingml/2006/main">
               <a:ext uri="{FF2B5EF4-FFF2-40B4-BE49-F238E27FC236}">
-                <a16:creationId xmlns:a16="http://schemas.microsoft.com/office/drawing/2014/main" id="{7E7935D1-CA6D-4B61-A01B-1D539888203D}"/>
+                <a16:creationId xmlns:a16="http://schemas.microsoft.com/office/drawing/2014/main" id="{68EB66EA-68DF-46BE-857C-B48FD78F348D}"/>
               </a:ext>
             </a:extLst>
           </p:cNvPr>
@@ -5876,7 +5876,7 @@
           <p:cNvPr id="7" name="">
             <a:extLst xmlns:a="http://schemas.openxmlformats.org/drawingml/2006/main">
               <a:ext uri="{FF2B5EF4-FFF2-40B4-BE49-F238E27FC236}">
-                <a16:creationId xmlns:a16="http://schemas.microsoft.com/office/drawing/2014/main" id="{B9D51630-E416-40D2-9663-BD2C98F40BB4}"/>
+                <a16:creationId xmlns:a16="http://schemas.microsoft.com/office/drawing/2014/main" id="{8226F6ED-1716-48C1-AD63-442E2ED48E4B}"/>
               </a:ext>
             </a:extLst>
           </p:cNvPr>
@@ -5908,7 +5908,7 @@
           <p:cNvPr id="8" name="">
             <a:extLst xmlns:a="http://schemas.openxmlformats.org/drawingml/2006/main">
               <a:ext uri="{FF2B5EF4-FFF2-40B4-BE49-F238E27FC236}">
-                <a16:creationId xmlns:a16="http://schemas.microsoft.com/office/drawing/2014/main" id="{C0E60B63-EAEA-4616-9548-E9F71AC27CB1}"/>
+                <a16:creationId xmlns:a16="http://schemas.microsoft.com/office/drawing/2014/main" id="{E7E2DE46-064B-4DD5-90C7-398E24C65464}"/>
               </a:ext>
             </a:extLst>
           </p:cNvPr>
@@ -5965,7 +5965,7 @@
           <p:cNvPr id="9" name="">
             <a:extLst xmlns:a="http://schemas.openxmlformats.org/drawingml/2006/main">
               <a:ext uri="{FF2B5EF4-FFF2-40B4-BE49-F238E27FC236}">
-                <a16:creationId xmlns:a16="http://schemas.microsoft.com/office/drawing/2014/main" id="{A00D1FB8-29B2-4A04-8FB0-CB1BE487EA78}"/>
+                <a16:creationId xmlns:a16="http://schemas.microsoft.com/office/drawing/2014/main" id="{8D58783E-EECC-4D3C-B036-A7B8239BA2F1}"/>
               </a:ext>
             </a:extLst>
           </p:cNvPr>
@@ -6022,7 +6022,7 @@
           <p:cNvPr id="10" name="">
             <a:extLst xmlns:a="http://schemas.openxmlformats.org/drawingml/2006/main">
               <a:ext uri="{FF2B5EF4-FFF2-40B4-BE49-F238E27FC236}">
-                <a16:creationId xmlns:a16="http://schemas.microsoft.com/office/drawing/2014/main" id="{C65C9BD8-DA51-4CC6-BAF8-8F260825DEB8}"/>
+                <a16:creationId xmlns:a16="http://schemas.microsoft.com/office/drawing/2014/main" id="{737EAEB9-78EB-4F09-8610-6CCFC42CDE94}"/>
               </a:ext>
             </a:extLst>
           </p:cNvPr>
@@ -6056,7 +6056,7 @@
           <p:cNvPr id="11" name="">
             <a:extLst xmlns:a="http://schemas.openxmlformats.org/drawingml/2006/main">
               <a:ext uri="{FF2B5EF4-FFF2-40B4-BE49-F238E27FC236}">
-                <a16:creationId xmlns:a16="http://schemas.microsoft.com/office/drawing/2014/main" id="{DF864A14-EB4C-4520-8FF1-72E1BFF0FA44}"/>
+                <a16:creationId xmlns:a16="http://schemas.microsoft.com/office/drawing/2014/main" id="{B64BF039-1A32-448D-8F83-536E55C57CCF}"/>
               </a:ext>
             </a:extLst>
           </p:cNvPr>
@@ -6088,7 +6088,7 @@
           <p:cNvPr id="12" name="">
             <a:extLst xmlns:a="http://schemas.openxmlformats.org/drawingml/2006/main">
               <a:ext uri="{FF2B5EF4-FFF2-40B4-BE49-F238E27FC236}">
-                <a16:creationId xmlns:a16="http://schemas.microsoft.com/office/drawing/2014/main" id="{16F62C6C-B473-4A76-A23B-9395B5753BB3}"/>
+                <a16:creationId xmlns:a16="http://schemas.microsoft.com/office/drawing/2014/main" id="{809ABD8B-6F22-4207-9D98-11FBD97DEEFF}"/>
               </a:ext>
             </a:extLst>
           </p:cNvPr>
@@ -6145,7 +6145,7 @@
           <p:cNvPr id="13" name="">
             <a:extLst xmlns:a="http://schemas.openxmlformats.org/drawingml/2006/main">
               <a:ext uri="{FF2B5EF4-FFF2-40B4-BE49-F238E27FC236}">
-                <a16:creationId xmlns:a16="http://schemas.microsoft.com/office/drawing/2014/main" id="{76D04574-688F-4D19-9A8B-B108A762B3A1}"/>
+                <a16:creationId xmlns:a16="http://schemas.microsoft.com/office/drawing/2014/main" id="{9D8BD78D-3DE0-41FB-8BA2-23ACD0F81544}"/>
               </a:ext>
             </a:extLst>
           </p:cNvPr>
@@ -6202,7 +6202,7 @@
           <p:cNvPr id="14" name="">
             <a:extLst xmlns:a="http://schemas.openxmlformats.org/drawingml/2006/main">
               <a:ext uri="{FF2B5EF4-FFF2-40B4-BE49-F238E27FC236}">
-                <a16:creationId xmlns:a16="http://schemas.microsoft.com/office/drawing/2014/main" id="{F7C6006A-3B6C-4061-ABA6-89434C9E64D8}"/>
+                <a16:creationId xmlns:a16="http://schemas.microsoft.com/office/drawing/2014/main" id="{3AC40D35-A6D8-4BF9-B2EB-849A60124424}"/>
               </a:ext>
             </a:extLst>
           </p:cNvPr>
@@ -6236,7 +6236,7 @@
           <p:cNvPr id="15" name="">
             <a:extLst xmlns:a="http://schemas.openxmlformats.org/drawingml/2006/main">
               <a:ext uri="{FF2B5EF4-FFF2-40B4-BE49-F238E27FC236}">
-                <a16:creationId xmlns:a16="http://schemas.microsoft.com/office/drawing/2014/main" id="{49D807B9-D486-4DF8-8E36-44D5B80A32C9}"/>
+                <a16:creationId xmlns:a16="http://schemas.microsoft.com/office/drawing/2014/main" id="{DEB28B5F-DF0D-4758-8581-F778A4F5067C}"/>
               </a:ext>
             </a:extLst>
           </p:cNvPr>
@@ -6268,7 +6268,7 @@
           <p:cNvPr id="16" name="">
             <a:extLst xmlns:a="http://schemas.openxmlformats.org/drawingml/2006/main">
               <a:ext uri="{FF2B5EF4-FFF2-40B4-BE49-F238E27FC236}">
-                <a16:creationId xmlns:a16="http://schemas.microsoft.com/office/drawing/2014/main" id="{D41FB8D5-A6A4-4604-97FC-8D15F6D26CBF}"/>
+                <a16:creationId xmlns:a16="http://schemas.microsoft.com/office/drawing/2014/main" id="{C8F179B1-9355-4FA4-8F2A-327F55626039}"/>
               </a:ext>
             </a:extLst>
           </p:cNvPr>
@@ -6325,7 +6325,7 @@
           <p:cNvPr id="17" name="">
             <a:extLst xmlns:a="http://schemas.openxmlformats.org/drawingml/2006/main">
               <a:ext uri="{FF2B5EF4-FFF2-40B4-BE49-F238E27FC236}">
-                <a16:creationId xmlns:a16="http://schemas.microsoft.com/office/drawing/2014/main" id="{8AA7EF3C-C45A-4350-8608-C0D1EEC5A681}"/>
+                <a16:creationId xmlns:a16="http://schemas.microsoft.com/office/drawing/2014/main" id="{345DE482-5AA3-4C97-8ACE-9384B604D3E7}"/>
               </a:ext>
             </a:extLst>
           </p:cNvPr>
@@ -6382,7 +6382,7 @@
           <p:cNvPr id="18" name="">
             <a:extLst xmlns:a="http://schemas.openxmlformats.org/drawingml/2006/main">
               <a:ext uri="{FF2B5EF4-FFF2-40B4-BE49-F238E27FC236}">
-                <a16:creationId xmlns:a16="http://schemas.microsoft.com/office/drawing/2014/main" id="{B6FB03EA-E47D-4314-87D7-217C99F11246}"/>
+                <a16:creationId xmlns:a16="http://schemas.microsoft.com/office/drawing/2014/main" id="{D2D2C14D-CE54-435E-B375-F38D1C621B71}"/>
               </a:ext>
             </a:extLst>
           </p:cNvPr>
@@ -6416,7 +6416,7 @@
           <p:cNvPr id="19" name="">
             <a:extLst xmlns:a="http://schemas.openxmlformats.org/drawingml/2006/main">
               <a:ext uri="{FF2B5EF4-FFF2-40B4-BE49-F238E27FC236}">
-                <a16:creationId xmlns:a16="http://schemas.microsoft.com/office/drawing/2014/main" id="{C1F02524-55BD-466D-A4C2-C207A04867FD}"/>
+                <a16:creationId xmlns:a16="http://schemas.microsoft.com/office/drawing/2014/main" id="{AA5A5B6B-7167-4792-9624-CE130696E1CC}"/>
               </a:ext>
             </a:extLst>
           </p:cNvPr>
@@ -6448,7 +6448,7 @@
           <p:cNvPr id="20" name="">
             <a:extLst xmlns:a="http://schemas.openxmlformats.org/drawingml/2006/main">
               <a:ext uri="{FF2B5EF4-FFF2-40B4-BE49-F238E27FC236}">
-                <a16:creationId xmlns:a16="http://schemas.microsoft.com/office/drawing/2014/main" id="{B0E8C816-7789-4960-8018-A886B4A8373E}"/>
+                <a16:creationId xmlns:a16="http://schemas.microsoft.com/office/drawing/2014/main" id="{23E90523-7065-4E5D-8C94-A3559045FD97}"/>
               </a:ext>
             </a:extLst>
           </p:cNvPr>
@@ -6505,7 +6505,7 @@
           <p:cNvPr id="21" name="">
             <a:extLst xmlns:a="http://schemas.openxmlformats.org/drawingml/2006/main">
               <a:ext uri="{FF2B5EF4-FFF2-40B4-BE49-F238E27FC236}">
-                <a16:creationId xmlns:a16="http://schemas.microsoft.com/office/drawing/2014/main" id="{D969C5B6-8171-4615-AC07-AC131BD43887}"/>
+                <a16:creationId xmlns:a16="http://schemas.microsoft.com/office/drawing/2014/main" id="{98FD8CF3-682B-4292-9B4A-1C3CC827F91C}"/>
               </a:ext>
             </a:extLst>
           </p:cNvPr>
@@ -6562,7 +6562,7 @@
           <p:cNvPr id="22" name="">
             <a:extLst xmlns:a="http://schemas.openxmlformats.org/drawingml/2006/main">
               <a:ext uri="{FF2B5EF4-FFF2-40B4-BE49-F238E27FC236}">
-                <a16:creationId xmlns:a16="http://schemas.microsoft.com/office/drawing/2014/main" id="{CBE10DD2-5740-4E16-9B85-4EBA4AE42249}"/>
+                <a16:creationId xmlns:a16="http://schemas.microsoft.com/office/drawing/2014/main" id="{68B67DDD-64AA-4CC4-9575-225FBE81C052}"/>
               </a:ext>
             </a:extLst>
           </p:cNvPr>
@@ -6617,7 +6617,7 @@
     </p:spTree>
     <p:extLst>
       <p:ext uri="{BB962C8B-B14F-4D97-AF65-F5344CB8AC3E}">
-        <p14:creationId xmlns:p14="http://schemas.microsoft.com/office/powerpoint/2010/main" val="91825884"/>
+        <p14:creationId xmlns:p14="http://schemas.microsoft.com/office/powerpoint/2010/main" val="2008475377"/>
       </p:ext>
     </p:extLst>
   </p:cSld>
@@ -6818,7 +6818,7 @@
           <p:cNvPr id="16" name="">
             <a:extLst xmlns:a="http://schemas.openxmlformats.org/drawingml/2006/main">
               <a:ext uri="{FF2B5EF4-FFF2-40B4-BE49-F238E27FC236}">
-                <a16:creationId xmlns:a16="http://schemas.microsoft.com/office/drawing/2014/main" id="{E8E1179E-5AB6-4004-83FF-7C2AFD2805C4}"/>
+                <a16:creationId xmlns:a16="http://schemas.microsoft.com/office/drawing/2014/main" id="{E9039407-CB90-41A8-A3CE-0CCC8B983C66}"/>
               </a:ext>
             </a:extLst>
           </p:cNvPr>
@@ -6850,7 +6850,7 @@
           <p:cNvPr id="2" name="">
             <a:extLst xmlns:a="http://schemas.openxmlformats.org/drawingml/2006/main">
               <a:ext uri="{FF2B5EF4-FFF2-40B4-BE49-F238E27FC236}">
-                <a16:creationId xmlns:a16="http://schemas.microsoft.com/office/drawing/2014/main" id="{0BC2583A-D6EB-4518-8C92-328F9684C22F}"/>
+                <a16:creationId xmlns:a16="http://schemas.microsoft.com/office/drawing/2014/main" id="{84795E7D-BBB2-4CC4-A0A3-47CC94C839D0}"/>
               </a:ext>
             </a:extLst>
           </p:cNvPr>
@@ -6907,7 +6907,7 @@
           <p:cNvPr id="3" name="">
             <a:extLst xmlns:a="http://schemas.openxmlformats.org/drawingml/2006/main">
               <a:ext uri="{FF2B5EF4-FFF2-40B4-BE49-F238E27FC236}">
-                <a16:creationId xmlns:a16="http://schemas.microsoft.com/office/drawing/2014/main" id="{D2149EBA-3E69-4EA2-B500-C6BCEDAA1E1A}"/>
+                <a16:creationId xmlns:a16="http://schemas.microsoft.com/office/drawing/2014/main" id="{1A03C320-7C92-4132-915A-4993D90C157B}"/>
               </a:ext>
             </a:extLst>
           </p:cNvPr>
@@ -6939,7 +6939,7 @@
           <p:cNvPr id="4" name="">
             <a:extLst xmlns:a="http://schemas.openxmlformats.org/drawingml/2006/main">
               <a:ext uri="{FF2B5EF4-FFF2-40B4-BE49-F238E27FC236}">
-                <a16:creationId xmlns:a16="http://schemas.microsoft.com/office/drawing/2014/main" id="{35AC3EB7-77C8-43E3-A209-06B834D663CE}"/>
+                <a16:creationId xmlns:a16="http://schemas.microsoft.com/office/drawing/2014/main" id="{B1634A61-3FD7-4690-BDAD-2A52F9236491}"/>
               </a:ext>
             </a:extLst>
           </p:cNvPr>
@@ -6996,7 +6996,7 @@
           <p:cNvPr id="5" name="">
             <a:extLst xmlns:a="http://schemas.openxmlformats.org/drawingml/2006/main">
               <a:ext uri="{FF2B5EF4-FFF2-40B4-BE49-F238E27FC236}">
-                <a16:creationId xmlns:a16="http://schemas.microsoft.com/office/drawing/2014/main" id="{1C5E9BA4-C50A-4693-B1B8-18C5192153ED}"/>
+                <a16:creationId xmlns:a16="http://schemas.microsoft.com/office/drawing/2014/main" id="{0905BD46-58DF-4500-BF4F-2498684F4AF3}"/>
               </a:ext>
             </a:extLst>
           </p:cNvPr>
@@ -7053,7 +7053,7 @@
           <p:cNvPr id="6" name="">
             <a:extLst xmlns:a="http://schemas.openxmlformats.org/drawingml/2006/main">
               <a:ext uri="{FF2B5EF4-FFF2-40B4-BE49-F238E27FC236}">
-                <a16:creationId xmlns:a16="http://schemas.microsoft.com/office/drawing/2014/main" id="{B09214F0-B950-4522-8B66-C003C7651012}"/>
+                <a16:creationId xmlns:a16="http://schemas.microsoft.com/office/drawing/2014/main" id="{D127997A-DEC1-4792-823D-9E330D4F5412}"/>
               </a:ext>
             </a:extLst>
           </p:cNvPr>
@@ -7110,7 +7110,7 @@
           <p:cNvPr id="7" name="">
             <a:extLst xmlns:a="http://schemas.openxmlformats.org/drawingml/2006/main">
               <a:ext uri="{FF2B5EF4-FFF2-40B4-BE49-F238E27FC236}">
-                <a16:creationId xmlns:a16="http://schemas.microsoft.com/office/drawing/2014/main" id="{49FE1829-CAC2-4DEB-BE3D-FA26D5E1EEAD}"/>
+                <a16:creationId xmlns:a16="http://schemas.microsoft.com/office/drawing/2014/main" id="{524B0A8C-771D-409C-867C-474B3AE80D25}"/>
               </a:ext>
             </a:extLst>
           </p:cNvPr>
@@ -7142,7 +7142,7 @@
           <p:cNvPr id="8" name="">
             <a:extLst xmlns:a="http://schemas.openxmlformats.org/drawingml/2006/main">
               <a:ext uri="{FF2B5EF4-FFF2-40B4-BE49-F238E27FC236}">
-                <a16:creationId xmlns:a16="http://schemas.microsoft.com/office/drawing/2014/main" id="{B85CDA2B-4C0E-4AF8-ABFE-EF50D38DCDD0}"/>
+                <a16:creationId xmlns:a16="http://schemas.microsoft.com/office/drawing/2014/main" id="{A4CBDEEA-12A9-4DDD-8313-34F2DCB20938}"/>
               </a:ext>
             </a:extLst>
           </p:cNvPr>
@@ -7199,7 +7199,7 @@
           <p:cNvPr id="9" name="">
             <a:extLst xmlns:a="http://schemas.openxmlformats.org/drawingml/2006/main">
               <a:ext uri="{FF2B5EF4-FFF2-40B4-BE49-F238E27FC236}">
-                <a16:creationId xmlns:a16="http://schemas.microsoft.com/office/drawing/2014/main" id="{1199C380-20EB-4F7F-AE50-DC263687C494}"/>
+                <a16:creationId xmlns:a16="http://schemas.microsoft.com/office/drawing/2014/main" id="{750E0CEA-1D9D-4032-818F-CA9C4D76E5E4}"/>
               </a:ext>
             </a:extLst>
           </p:cNvPr>
@@ -7256,7 +7256,7 @@
           <p:cNvPr id="10" name="">
             <a:extLst xmlns:a="http://schemas.openxmlformats.org/drawingml/2006/main">
               <a:ext uri="{FF2B5EF4-FFF2-40B4-BE49-F238E27FC236}">
-                <a16:creationId xmlns:a16="http://schemas.microsoft.com/office/drawing/2014/main" id="{AC3CB08B-2094-42F3-B79C-8DCC9D2A8592}"/>
+                <a16:creationId xmlns:a16="http://schemas.microsoft.com/office/drawing/2014/main" id="{18EB6B21-4E55-47A7-81AF-2D08705C5E9E}"/>
               </a:ext>
             </a:extLst>
           </p:cNvPr>
@@ -7313,7 +7313,7 @@
           <p:cNvPr id="11" name="">
             <a:extLst xmlns:a="http://schemas.openxmlformats.org/drawingml/2006/main">
               <a:ext uri="{FF2B5EF4-FFF2-40B4-BE49-F238E27FC236}">
-                <a16:creationId xmlns:a16="http://schemas.microsoft.com/office/drawing/2014/main" id="{B0C116FB-10BF-49B4-A2C7-B96F8975E0F6}"/>
+                <a16:creationId xmlns:a16="http://schemas.microsoft.com/office/drawing/2014/main" id="{7737CFE5-0F1B-4B73-AD1B-B82AC8CD1EDE}"/>
               </a:ext>
             </a:extLst>
           </p:cNvPr>
@@ -7345,7 +7345,7 @@
           <p:cNvPr id="12" name="">
             <a:extLst xmlns:a="http://schemas.openxmlformats.org/drawingml/2006/main">
               <a:ext uri="{FF2B5EF4-FFF2-40B4-BE49-F238E27FC236}">
-                <a16:creationId xmlns:a16="http://schemas.microsoft.com/office/drawing/2014/main" id="{62D5EC4F-D7ED-4D28-8CB9-D3D80A6BA68A}"/>
+                <a16:creationId xmlns:a16="http://schemas.microsoft.com/office/drawing/2014/main" id="{3634E5C7-AF1D-441F-B58F-38F19401AA7D}"/>
               </a:ext>
             </a:extLst>
           </p:cNvPr>
@@ -7402,7 +7402,7 @@
           <p:cNvPr id="13" name="">
             <a:extLst xmlns:a="http://schemas.openxmlformats.org/drawingml/2006/main">
               <a:ext uri="{FF2B5EF4-FFF2-40B4-BE49-F238E27FC236}">
-                <a16:creationId xmlns:a16="http://schemas.microsoft.com/office/drawing/2014/main" id="{4BBB2B5C-4416-45BD-B965-126113ECEB1E}"/>
+                <a16:creationId xmlns:a16="http://schemas.microsoft.com/office/drawing/2014/main" id="{637DE8B8-D924-44AB-9EFD-CD09522AE32B}"/>
               </a:ext>
             </a:extLst>
           </p:cNvPr>
@@ -7459,7 +7459,7 @@
           <p:cNvPr id="14" name="">
             <a:extLst xmlns:a="http://schemas.openxmlformats.org/drawingml/2006/main">
               <a:ext uri="{FF2B5EF4-FFF2-40B4-BE49-F238E27FC236}">
-                <a16:creationId xmlns:a16="http://schemas.microsoft.com/office/drawing/2014/main" id="{9F6F9BBB-1A1C-4839-8ED4-7EF1A557FC86}"/>
+                <a16:creationId xmlns:a16="http://schemas.microsoft.com/office/drawing/2014/main" id="{79A9B922-3C46-4330-9F90-28951A8BC322}"/>
               </a:ext>
             </a:extLst>
           </p:cNvPr>
@@ -7516,7 +7516,7 @@
           <p:cNvPr id="15" name="">
             <a:extLst xmlns:a="http://schemas.openxmlformats.org/drawingml/2006/main">
               <a:ext uri="{FF2B5EF4-FFF2-40B4-BE49-F238E27FC236}">
-                <a16:creationId xmlns:a16="http://schemas.microsoft.com/office/drawing/2014/main" id="{6D2BC586-84E8-4DD8-A3B4-14B5CE7A1662}"/>
+                <a16:creationId xmlns:a16="http://schemas.microsoft.com/office/drawing/2014/main" id="{DFC98ED8-ACD5-41B4-B7E8-6FB41CDA4891}"/>
               </a:ext>
             </a:extLst>
           </p:cNvPr>
@@ -7571,7 +7571,7 @@
     </p:spTree>
     <p:extLst>
       <p:ext uri="{BB962C8B-B14F-4D97-AF65-F5344CB8AC3E}">
-        <p14:creationId xmlns:p14="http://schemas.microsoft.com/office/powerpoint/2010/main" val="155914355"/>
+        <p14:creationId xmlns:p14="http://schemas.microsoft.com/office/powerpoint/2010/main" val="347037648"/>
       </p:ext>
     </p:extLst>
   </p:cSld>
@@ -7772,7 +7772,7 @@
           <p:cNvPr id="23" name="">
             <a:extLst xmlns:a="http://schemas.openxmlformats.org/drawingml/2006/main">
               <a:ext uri="{FF2B5EF4-FFF2-40B4-BE49-F238E27FC236}">
-                <a16:creationId xmlns:a16="http://schemas.microsoft.com/office/drawing/2014/main" id="{4BDCA869-39FC-4CAE-96A8-AFCFF98D45EE}"/>
+                <a16:creationId xmlns:a16="http://schemas.microsoft.com/office/drawing/2014/main" id="{D1ABE43E-42B1-4E4F-B371-6F92209E1DAF}"/>
               </a:ext>
             </a:extLst>
           </p:cNvPr>
@@ -7804,7 +7804,7 @@
           <p:cNvPr id="2" name="">
             <a:extLst xmlns:a="http://schemas.openxmlformats.org/drawingml/2006/main">
               <a:ext uri="{FF2B5EF4-FFF2-40B4-BE49-F238E27FC236}">
-                <a16:creationId xmlns:a16="http://schemas.microsoft.com/office/drawing/2014/main" id="{93BC2CE4-097E-403C-81D9-A6400F891466}"/>
+                <a16:creationId xmlns:a16="http://schemas.microsoft.com/office/drawing/2014/main" id="{2086D983-E9F0-4171-8C36-0D18868CE037}"/>
               </a:ext>
             </a:extLst>
           </p:cNvPr>
@@ -7861,7 +7861,7 @@
           <p:cNvPr id="3" name="">
             <a:extLst xmlns:a="http://schemas.openxmlformats.org/drawingml/2006/main">
               <a:ext uri="{FF2B5EF4-FFF2-40B4-BE49-F238E27FC236}">
-                <a16:creationId xmlns:a16="http://schemas.microsoft.com/office/drawing/2014/main" id="{BC6DBDE6-DF01-4DD5-BB96-7691FEC9E973}"/>
+                <a16:creationId xmlns:a16="http://schemas.microsoft.com/office/drawing/2014/main" id="{9EAF917E-C337-4B00-9676-18D444935416}"/>
               </a:ext>
             </a:extLst>
           </p:cNvPr>
@@ -7893,7 +7893,7 @@
           <p:cNvPr id="4" name="">
             <a:extLst xmlns:a="http://schemas.openxmlformats.org/drawingml/2006/main">
               <a:ext uri="{FF2B5EF4-FFF2-40B4-BE49-F238E27FC236}">
-                <a16:creationId xmlns:a16="http://schemas.microsoft.com/office/drawing/2014/main" id="{B23BC60E-6A68-40F9-B1C2-C6A60E461B7F}"/>
+                <a16:creationId xmlns:a16="http://schemas.microsoft.com/office/drawing/2014/main" id="{CD0473E1-E4F3-440D-A2BC-F7672A45E453}"/>
               </a:ext>
             </a:extLst>
           </p:cNvPr>
@@ -7950,7 +7950,7 @@
           <p:cNvPr id="5" name="">
             <a:extLst xmlns:a="http://schemas.openxmlformats.org/drawingml/2006/main">
               <a:ext uri="{FF2B5EF4-FFF2-40B4-BE49-F238E27FC236}">
-                <a16:creationId xmlns:a16="http://schemas.microsoft.com/office/drawing/2014/main" id="{EE109288-B537-48C9-860F-7D4E2B30E20B}"/>
+                <a16:creationId xmlns:a16="http://schemas.microsoft.com/office/drawing/2014/main" id="{0600BDCF-7EF4-4B10-8D3A-0E615DB52653}"/>
               </a:ext>
             </a:extLst>
           </p:cNvPr>
@@ -8007,7 +8007,7 @@
           <p:cNvPr id="6" name="">
             <a:extLst xmlns:a="http://schemas.openxmlformats.org/drawingml/2006/main">
               <a:ext uri="{FF2B5EF4-FFF2-40B4-BE49-F238E27FC236}">
-                <a16:creationId xmlns:a16="http://schemas.microsoft.com/office/drawing/2014/main" id="{5DB7B4AE-D10F-4182-A03B-E9C0E8F1E538}"/>
+                <a16:creationId xmlns:a16="http://schemas.microsoft.com/office/drawing/2014/main" id="{548D2241-61C9-4BE6-93EA-EF46B81E74B1}"/>
               </a:ext>
             </a:extLst>
           </p:cNvPr>
@@ -8064,7 +8064,7 @@
           <p:cNvPr id="7" name="">
             <a:extLst xmlns:a="http://schemas.openxmlformats.org/drawingml/2006/main">
               <a:ext uri="{FF2B5EF4-FFF2-40B4-BE49-F238E27FC236}">
-                <a16:creationId xmlns:a16="http://schemas.microsoft.com/office/drawing/2014/main" id="{13BEA722-1829-4985-95D3-B09BE882B5FE}"/>
+                <a16:creationId xmlns:a16="http://schemas.microsoft.com/office/drawing/2014/main" id="{C1C35C9F-C1B6-455E-95E4-DB7788EBE023}"/>
               </a:ext>
             </a:extLst>
           </p:cNvPr>
@@ -8096,7 +8096,7 @@
           <p:cNvPr id="8" name="">
             <a:extLst xmlns:a="http://schemas.openxmlformats.org/drawingml/2006/main">
               <a:ext uri="{FF2B5EF4-FFF2-40B4-BE49-F238E27FC236}">
-                <a16:creationId xmlns:a16="http://schemas.microsoft.com/office/drawing/2014/main" id="{1BE4CA15-E04D-4CE7-BB10-DBB1AC188239}"/>
+                <a16:creationId xmlns:a16="http://schemas.microsoft.com/office/drawing/2014/main" id="{B57589AC-A55A-4509-A31A-28E7DBCE107A}"/>
               </a:ext>
             </a:extLst>
           </p:cNvPr>
@@ -8153,7 +8153,7 @@
           <p:cNvPr id="9" name="">
             <a:extLst xmlns:a="http://schemas.openxmlformats.org/drawingml/2006/main">
               <a:ext uri="{FF2B5EF4-FFF2-40B4-BE49-F238E27FC236}">
-                <a16:creationId xmlns:a16="http://schemas.microsoft.com/office/drawing/2014/main" id="{F945B64A-859C-4569-8D6E-11CB02DFEFB9}"/>
+                <a16:creationId xmlns:a16="http://schemas.microsoft.com/office/drawing/2014/main" id="{7BADBF5E-9BAB-4223-BBC7-C08306335AAB}"/>
               </a:ext>
             </a:extLst>
           </p:cNvPr>
@@ -8210,19 +8210,19 @@
           <p:cNvPr id="10" name="">
             <a:extLst xmlns:a="http://schemas.openxmlformats.org/drawingml/2006/main">
               <a:ext uri="{FF2B5EF4-FFF2-40B4-BE49-F238E27FC236}">
-                <a16:creationId xmlns:a16="http://schemas.microsoft.com/office/drawing/2014/main" id="{65B78E8F-033C-4AA6-95E8-D0DA2A99AF41}"/>
-              </a:ext>
-            </a:extLst>
-          </p:cNvPr>
-          <p:cNvSpPr>
-            <a:spLocks xmlns:a="http://schemas.openxmlformats.org/drawingml/2006/main" noGrp="1"/>
-          </p:cNvSpPr>
-          <p:nvPr/>
-        </p:nvSpPr>
-        <p:spPr>
-          <a:xfrm xmlns:a="http://schemas.openxmlformats.org/drawingml/2006/main">
-            <a:off x="914400" y="1257300"/>
-            <a:ext cx="10363200" cy="781050"/>
+                <a16:creationId xmlns:a16="http://schemas.microsoft.com/office/drawing/2014/main" id="{D8A2FB61-4871-455D-932A-21A514DCE9BB}"/>
+              </a:ext>
+            </a:extLst>
+          </p:cNvPr>
+          <p:cNvSpPr>
+            <a:spLocks xmlns:a="http://schemas.openxmlformats.org/drawingml/2006/main" noGrp="1"/>
+          </p:cNvSpPr>
+          <p:nvPr/>
+        </p:nvSpPr>
+        <p:spPr>
+          <a:xfrm xmlns:a="http://schemas.openxmlformats.org/drawingml/2006/main">
+            <a:off x="857250" y="1219200"/>
+            <a:ext cx="10477500" cy="742950"/>
           </a:xfrm>
           <a:prstGeom xmlns:a="http://schemas.openxmlformats.org/drawingml/2006/main" prst="rect">
             <a:avLst/>
@@ -8239,7 +8239,7 @@
           <a:lstStyle xmlns:a="http://schemas.openxmlformats.org/drawingml/2006/main"/>
           <a:p xmlns:a="http://schemas.openxmlformats.org/drawingml/2006/main">
             <a:pPr algn="ctr">
-              <a:defRPr sz="2175" b="1">
+              <a:defRPr sz="2100" b="1">
                 <a:solidFill>
                   <a:srgbClr val="17253A"/>
                 </a:solidFill>
@@ -8249,7 +8249,7 @@
               </a:defRPr>
             </a:pPr>
             <a:r>
-              <a:rPr sz="2175" b="1">
+              <a:rPr sz="2100" b="1">
                 <a:solidFill>
                   <a:srgbClr val="17253A"/>
                 </a:solidFill>
@@ -8267,28 +8267,30 @@
           <p:cNvPr id="11" name="">
             <a:extLst xmlns:a="http://schemas.openxmlformats.org/drawingml/2006/main">
               <a:ext uri="{FF2B5EF4-FFF2-40B4-BE49-F238E27FC236}">
-                <a16:creationId xmlns:a16="http://schemas.microsoft.com/office/drawing/2014/main" id="{2A50CA0A-2DF7-4590-8C57-44D7536BF7D8}"/>
-              </a:ext>
-            </a:extLst>
-          </p:cNvPr>
-          <p:cNvSpPr>
-            <a:spLocks xmlns:a="http://schemas.openxmlformats.org/drawingml/2006/main" noGrp="1"/>
-          </p:cNvSpPr>
-          <p:nvPr/>
-        </p:nvSpPr>
-        <p:spPr>
-          <a:xfrm xmlns:a="http://schemas.openxmlformats.org/drawingml/2006/main">
-            <a:off x="1000125" y="2247900"/>
-            <a:ext cx="476250" cy="476250"/>
-          </a:xfrm>
-          <a:prstGeom xmlns:a="http://schemas.openxmlformats.org/drawingml/2006/main" prst="ellipse">
+                <a16:creationId xmlns:a16="http://schemas.microsoft.com/office/drawing/2014/main" id="{8EFEC7AF-90BA-48E4-9A66-7A988A6ACDA4}"/>
+              </a:ext>
+            </a:extLst>
+          </p:cNvPr>
+          <p:cNvSpPr>
+            <a:spLocks xmlns:a="http://schemas.openxmlformats.org/drawingml/2006/main" noGrp="1"/>
+          </p:cNvSpPr>
+          <p:nvPr/>
+        </p:nvSpPr>
+        <p:spPr>
+          <a:xfrm xmlns:a="http://schemas.openxmlformats.org/drawingml/2006/main">
+            <a:off x="971550" y="2124075"/>
+            <a:ext cx="38100" cy="3524250"/>
+          </a:xfrm>
+          <a:prstGeom xmlns:a="http://schemas.openxmlformats.org/drawingml/2006/main" prst="rect">
             <a:avLst/>
           </a:prstGeom>
           <a:solidFill xmlns:a="http://schemas.openxmlformats.org/drawingml/2006/main">
-            <a:srgbClr val="18324A"/>
+            <a:srgbClr val="2C6E73"/>
           </a:solidFill>
           <a:ln xmlns:a="http://schemas.openxmlformats.org/drawingml/2006/main" w="0">
-            <a:noFill/>
+            <a:solidFill>
+              <a:srgbClr val="2C6E73"/>
+            </a:solidFill>
           </a:ln>
         </p:spPr>
       </p:sp>
@@ -8297,19 +8299,19 @@
           <p:cNvPr id="12" name="">
             <a:extLst xmlns:a="http://schemas.openxmlformats.org/drawingml/2006/main">
               <a:ext uri="{FF2B5EF4-FFF2-40B4-BE49-F238E27FC236}">
-                <a16:creationId xmlns:a16="http://schemas.microsoft.com/office/drawing/2014/main" id="{18AA5E83-60FB-4EF3-9EF7-BB8A4BFABA09}"/>
-              </a:ext>
-            </a:extLst>
-          </p:cNvPr>
-          <p:cNvSpPr>
-            <a:spLocks xmlns:a="http://schemas.openxmlformats.org/drawingml/2006/main" noGrp="1"/>
-          </p:cNvSpPr>
-          <p:nvPr/>
-        </p:nvSpPr>
-        <p:spPr>
-          <a:xfrm xmlns:a="http://schemas.openxmlformats.org/drawingml/2006/main">
-            <a:off x="1000125" y="2276475"/>
-            <a:ext cx="476250" cy="419100"/>
+                <a16:creationId xmlns:a16="http://schemas.microsoft.com/office/drawing/2014/main" id="{53A54420-D76C-4D1C-93B3-8E8005EF7700}"/>
+              </a:ext>
+            </a:extLst>
+          </p:cNvPr>
+          <p:cNvSpPr>
+            <a:spLocks xmlns:a="http://schemas.openxmlformats.org/drawingml/2006/main" noGrp="1"/>
+          </p:cNvSpPr>
+          <p:nvPr/>
+        </p:nvSpPr>
+        <p:spPr>
+          <a:xfrm xmlns:a="http://schemas.openxmlformats.org/drawingml/2006/main">
+            <a:off x="1162050" y="2200275"/>
+            <a:ext cx="400050" cy="400050"/>
           </a:xfrm>
           <a:prstGeom xmlns:a="http://schemas.openxmlformats.org/drawingml/2006/main" prst="rect">
             <a:avLst/>
@@ -8326,9 +8328,9 @@
           <a:lstStyle xmlns:a="http://schemas.openxmlformats.org/drawingml/2006/main"/>
           <a:p xmlns:a="http://schemas.openxmlformats.org/drawingml/2006/main">
             <a:pPr algn="ctr">
-              <a:defRPr sz="1350" b="1">
-                <a:solidFill>
-                  <a:srgbClr val="FFFFFF"/>
+              <a:defRPr sz="1125" b="1">
+                <a:solidFill>
+                  <a:srgbClr val="2C6E73"/>
                 </a:solidFill>
                 <a:latin typeface="Arial"/>
                 <a:ea typeface="Arial"/>
@@ -8336,9 +8338,9 @@
               </a:defRPr>
             </a:pPr>
             <a:r>
-              <a:rPr sz="1350" b="1">
-                <a:solidFill>
-                  <a:srgbClr val="FFFFFF"/>
+              <a:rPr sz="1125" b="1">
+                <a:solidFill>
+                  <a:srgbClr val="2C6E73"/>
                 </a:solidFill>
                 <a:latin typeface="Arial"/>
                 <a:ea typeface="Arial"/>
@@ -8354,19 +8356,19 @@
           <p:cNvPr id="13" name="">
             <a:extLst xmlns:a="http://schemas.openxmlformats.org/drawingml/2006/main">
               <a:ext uri="{FF2B5EF4-FFF2-40B4-BE49-F238E27FC236}">
-                <a16:creationId xmlns:a16="http://schemas.microsoft.com/office/drawing/2014/main" id="{EF863CBB-482F-43A2-A4EF-0B71E75A246B}"/>
-              </a:ext>
-            </a:extLst>
-          </p:cNvPr>
-          <p:cNvSpPr>
-            <a:spLocks xmlns:a="http://schemas.openxmlformats.org/drawingml/2006/main" noGrp="1"/>
-          </p:cNvSpPr>
-          <p:nvPr/>
-        </p:nvSpPr>
-        <p:spPr>
-          <a:xfrm xmlns:a="http://schemas.openxmlformats.org/drawingml/2006/main">
-            <a:off x="1714500" y="2181225"/>
-            <a:ext cx="9429750" cy="609600"/>
+                <a16:creationId xmlns:a16="http://schemas.microsoft.com/office/drawing/2014/main" id="{2C742BB3-6B00-419C-8BFD-FF4AC95431A4}"/>
+              </a:ext>
+            </a:extLst>
+          </p:cNvPr>
+          <p:cNvSpPr>
+            <a:spLocks xmlns:a="http://schemas.openxmlformats.org/drawingml/2006/main" noGrp="1"/>
+          </p:cNvSpPr>
+          <p:nvPr/>
+        </p:nvSpPr>
+        <p:spPr>
+          <a:xfrm xmlns:a="http://schemas.openxmlformats.org/drawingml/2006/main">
+            <a:off x="1714500" y="2114550"/>
+            <a:ext cx="9525000" cy="809625"/>
           </a:xfrm>
           <a:prstGeom xmlns:a="http://schemas.openxmlformats.org/drawingml/2006/main" prst="rect">
             <a:avLst/>
@@ -8383,7 +8385,7 @@
           <a:lstStyle xmlns:a="http://schemas.openxmlformats.org/drawingml/2006/main"/>
           <a:p xmlns:a="http://schemas.openxmlformats.org/drawingml/2006/main">
             <a:pPr algn="l">
-              <a:defRPr sz="1500" b="0">
+              <a:defRPr sz="1725" b="0">
                 <a:solidFill>
                   <a:srgbClr val="17253A"/>
                 </a:solidFill>
@@ -8393,7 +8395,7 @@
               </a:defRPr>
             </a:pPr>
             <a:r>
-              <a:rPr sz="1500" b="0">
+              <a:rPr sz="1725" b="0">
                 <a:solidFill>
                   <a:srgbClr val="17253A"/>
                 </a:solidFill>
@@ -8401,7 +8403,7 @@
                 <a:ea typeface="Arial"/>
                 <a:cs typeface="Arial"/>
               </a:rPr>
-              <a:t>Identify the structure: Read the whole problem and mark the question and useful information.</a:t>
+              <a:t>36 pallets × 24 boxes</a:t>
             </a:r>
           </a:p>
         </p:txBody>
@@ -8411,28 +8413,30 @@
           <p:cNvPr id="14" name="">
             <a:extLst xmlns:a="http://schemas.openxmlformats.org/drawingml/2006/main">
               <a:ext uri="{FF2B5EF4-FFF2-40B4-BE49-F238E27FC236}">
-                <a16:creationId xmlns:a16="http://schemas.microsoft.com/office/drawing/2014/main" id="{56ACA75E-46F8-4B4A-8798-6E5F147D52D2}"/>
-              </a:ext>
-            </a:extLst>
-          </p:cNvPr>
-          <p:cNvSpPr>
-            <a:spLocks xmlns:a="http://schemas.openxmlformats.org/drawingml/2006/main" noGrp="1"/>
-          </p:cNvSpPr>
-          <p:nvPr/>
-        </p:nvSpPr>
-        <p:spPr>
-          <a:xfrm xmlns:a="http://schemas.openxmlformats.org/drawingml/2006/main">
-            <a:off x="1000125" y="2990850"/>
-            <a:ext cx="476250" cy="476250"/>
-          </a:xfrm>
-          <a:prstGeom xmlns:a="http://schemas.openxmlformats.org/drawingml/2006/main" prst="ellipse">
+                <a16:creationId xmlns:a16="http://schemas.microsoft.com/office/drawing/2014/main" id="{F78BAC67-5F50-41F7-ACE6-B34A15349E82}"/>
+              </a:ext>
+            </a:extLst>
+          </p:cNvPr>
+          <p:cNvSpPr>
+            <a:spLocks xmlns:a="http://schemas.openxmlformats.org/drawingml/2006/main" noGrp="1"/>
+          </p:cNvSpPr>
+          <p:nvPr/>
+        </p:nvSpPr>
+        <p:spPr>
+          <a:xfrm xmlns:a="http://schemas.openxmlformats.org/drawingml/2006/main">
+            <a:off x="1714500" y="2943225"/>
+            <a:ext cx="9334500" cy="9525"/>
+          </a:xfrm>
+          <a:prstGeom xmlns:a="http://schemas.openxmlformats.org/drawingml/2006/main" prst="rect">
             <a:avLst/>
           </a:prstGeom>
           <a:solidFill xmlns:a="http://schemas.openxmlformats.org/drawingml/2006/main">
-            <a:srgbClr val="2C6E73"/>
+            <a:srgbClr val="D9E0E6"/>
           </a:solidFill>
           <a:ln xmlns:a="http://schemas.openxmlformats.org/drawingml/2006/main" w="0">
-            <a:noFill/>
+            <a:solidFill>
+              <a:srgbClr val="D9E0E6"/>
+            </a:solidFill>
           </a:ln>
         </p:spPr>
       </p:sp>
@@ -8441,19 +8445,19 @@
           <p:cNvPr id="15" name="">
             <a:extLst xmlns:a="http://schemas.openxmlformats.org/drawingml/2006/main">
               <a:ext uri="{FF2B5EF4-FFF2-40B4-BE49-F238E27FC236}">
-                <a16:creationId xmlns:a16="http://schemas.microsoft.com/office/drawing/2014/main" id="{0CCD55BD-0257-4C75-B438-63F73192D388}"/>
-              </a:ext>
-            </a:extLst>
-          </p:cNvPr>
-          <p:cNvSpPr>
-            <a:spLocks xmlns:a="http://schemas.openxmlformats.org/drawingml/2006/main" noGrp="1"/>
-          </p:cNvSpPr>
-          <p:nvPr/>
-        </p:nvSpPr>
-        <p:spPr>
-          <a:xfrm xmlns:a="http://schemas.openxmlformats.org/drawingml/2006/main">
-            <a:off x="1000125" y="3019425"/>
-            <a:ext cx="476250" cy="419100"/>
+                <a16:creationId xmlns:a16="http://schemas.microsoft.com/office/drawing/2014/main" id="{2CE3263A-0B01-4884-A844-5BA5C61B1F7A}"/>
+              </a:ext>
+            </a:extLst>
+          </p:cNvPr>
+          <p:cNvSpPr>
+            <a:spLocks xmlns:a="http://schemas.openxmlformats.org/drawingml/2006/main" noGrp="1"/>
+          </p:cNvSpPr>
+          <p:nvPr/>
+        </p:nvSpPr>
+        <p:spPr>
+          <a:xfrm xmlns:a="http://schemas.openxmlformats.org/drawingml/2006/main">
+            <a:off x="1162050" y="3076575"/>
+            <a:ext cx="400050" cy="400050"/>
           </a:xfrm>
           <a:prstGeom xmlns:a="http://schemas.openxmlformats.org/drawingml/2006/main" prst="rect">
             <a:avLst/>
@@ -8470,9 +8474,9 @@
           <a:lstStyle xmlns:a="http://schemas.openxmlformats.org/drawingml/2006/main"/>
           <a:p xmlns:a="http://schemas.openxmlformats.org/drawingml/2006/main">
             <a:pPr algn="ctr">
-              <a:defRPr sz="1350" b="1">
-                <a:solidFill>
-                  <a:srgbClr val="FFFFFF"/>
+              <a:defRPr sz="1125" b="1">
+                <a:solidFill>
+                  <a:srgbClr val="2C6E73"/>
                 </a:solidFill>
                 <a:latin typeface="Arial"/>
                 <a:ea typeface="Arial"/>
@@ -8480,9 +8484,9 @@
               </a:defRPr>
             </a:pPr>
             <a:r>
-              <a:rPr sz="1350" b="1">
-                <a:solidFill>
-                  <a:srgbClr val="FFFFFF"/>
+              <a:rPr sz="1125" b="1">
+                <a:solidFill>
+                  <a:srgbClr val="2C6E73"/>
                 </a:solidFill>
                 <a:latin typeface="Arial"/>
                 <a:ea typeface="Arial"/>
@@ -8498,19 +8502,19 @@
           <p:cNvPr id="16" name="">
             <a:extLst xmlns:a="http://schemas.openxmlformats.org/drawingml/2006/main">
               <a:ext uri="{FF2B5EF4-FFF2-40B4-BE49-F238E27FC236}">
-                <a16:creationId xmlns:a16="http://schemas.microsoft.com/office/drawing/2014/main" id="{1D0C4BAB-E64D-4327-8C05-1940FCAF20EB}"/>
-              </a:ext>
-            </a:extLst>
-          </p:cNvPr>
-          <p:cNvSpPr>
-            <a:spLocks xmlns:a="http://schemas.openxmlformats.org/drawingml/2006/main" noGrp="1"/>
-          </p:cNvSpPr>
-          <p:nvPr/>
-        </p:nvSpPr>
-        <p:spPr>
-          <a:xfrm xmlns:a="http://schemas.openxmlformats.org/drawingml/2006/main">
-            <a:off x="1714500" y="2924175"/>
-            <a:ext cx="9429750" cy="609600"/>
+                <a16:creationId xmlns:a16="http://schemas.microsoft.com/office/drawing/2014/main" id="{9587AE00-DCCC-421C-BFE2-0874FF3A5C6D}"/>
+              </a:ext>
+            </a:extLst>
+          </p:cNvPr>
+          <p:cNvSpPr>
+            <a:spLocks xmlns:a="http://schemas.openxmlformats.org/drawingml/2006/main" noGrp="1"/>
+          </p:cNvSpPr>
+          <p:nvPr/>
+        </p:nvSpPr>
+        <p:spPr>
+          <a:xfrm xmlns:a="http://schemas.openxmlformats.org/drawingml/2006/main">
+            <a:off x="1714500" y="2990850"/>
+            <a:ext cx="9525000" cy="809625"/>
           </a:xfrm>
           <a:prstGeom xmlns:a="http://schemas.openxmlformats.org/drawingml/2006/main" prst="rect">
             <a:avLst/>
@@ -8527,7 +8531,7 @@
           <a:lstStyle xmlns:a="http://schemas.openxmlformats.org/drawingml/2006/main"/>
           <a:p xmlns:a="http://schemas.openxmlformats.org/drawingml/2006/main">
             <a:pPr algn="l">
-              <a:defRPr sz="1500" b="0">
+              <a:defRPr sz="1725" b="0">
                 <a:solidFill>
                   <a:srgbClr val="17253A"/>
                 </a:solidFill>
@@ -8537,7 +8541,7 @@
               </a:defRPr>
             </a:pPr>
             <a:r>
-              <a:rPr sz="1500" b="0">
+              <a:rPr sz="1725" b="0">
                 <a:solidFill>
                   <a:srgbClr val="17253A"/>
                 </a:solidFill>
@@ -8545,7 +8549,7 @@
                 <a:ea typeface="Arial"/>
                 <a:cs typeface="Arial"/>
               </a:rPr>
-              <a:t>Set up the method: Plan the operations in order before calculating.</a:t>
+              <a:t>36 × 24 = 864 boxes</a:t>
             </a:r>
           </a:p>
         </p:txBody>
@@ -8555,28 +8559,30 @@
           <p:cNvPr id="17" name="">
             <a:extLst xmlns:a="http://schemas.openxmlformats.org/drawingml/2006/main">
               <a:ext uri="{FF2B5EF4-FFF2-40B4-BE49-F238E27FC236}">
-                <a16:creationId xmlns:a16="http://schemas.microsoft.com/office/drawing/2014/main" id="{F5F74FBA-81DC-4EBF-B944-E8E309C957B9}"/>
-              </a:ext>
-            </a:extLst>
-          </p:cNvPr>
-          <p:cNvSpPr>
-            <a:spLocks xmlns:a="http://schemas.openxmlformats.org/drawingml/2006/main" noGrp="1"/>
-          </p:cNvSpPr>
-          <p:nvPr/>
-        </p:nvSpPr>
-        <p:spPr>
-          <a:xfrm xmlns:a="http://schemas.openxmlformats.org/drawingml/2006/main">
-            <a:off x="1000125" y="3733800"/>
-            <a:ext cx="476250" cy="476250"/>
-          </a:xfrm>
-          <a:prstGeom xmlns:a="http://schemas.openxmlformats.org/drawingml/2006/main" prst="ellipse">
+                <a16:creationId xmlns:a16="http://schemas.microsoft.com/office/drawing/2014/main" id="{967F2D80-60C4-440D-AE7D-F01CBA0A7174}"/>
+              </a:ext>
+            </a:extLst>
+          </p:cNvPr>
+          <p:cNvSpPr>
+            <a:spLocks xmlns:a="http://schemas.openxmlformats.org/drawingml/2006/main" noGrp="1"/>
+          </p:cNvSpPr>
+          <p:nvPr/>
+        </p:nvSpPr>
+        <p:spPr>
+          <a:xfrm xmlns:a="http://schemas.openxmlformats.org/drawingml/2006/main">
+            <a:off x="1714500" y="3819525"/>
+            <a:ext cx="9334500" cy="9525"/>
+          </a:xfrm>
+          <a:prstGeom xmlns:a="http://schemas.openxmlformats.org/drawingml/2006/main" prst="rect">
             <a:avLst/>
           </a:prstGeom>
           <a:solidFill xmlns:a="http://schemas.openxmlformats.org/drawingml/2006/main">
-            <a:srgbClr val="2C6E73"/>
+            <a:srgbClr val="D9E0E6"/>
           </a:solidFill>
           <a:ln xmlns:a="http://schemas.openxmlformats.org/drawingml/2006/main" w="0">
-            <a:noFill/>
+            <a:solidFill>
+              <a:srgbClr val="D9E0E6"/>
+            </a:solidFill>
           </a:ln>
         </p:spPr>
       </p:sp>
@@ -8585,19 +8591,19 @@
           <p:cNvPr id="18" name="">
             <a:extLst xmlns:a="http://schemas.openxmlformats.org/drawingml/2006/main">
               <a:ext uri="{FF2B5EF4-FFF2-40B4-BE49-F238E27FC236}">
-                <a16:creationId xmlns:a16="http://schemas.microsoft.com/office/drawing/2014/main" id="{6CCF64E6-0F4C-4B67-9382-5109D3223D3A}"/>
-              </a:ext>
-            </a:extLst>
-          </p:cNvPr>
-          <p:cNvSpPr>
-            <a:spLocks xmlns:a="http://schemas.openxmlformats.org/drawingml/2006/main" noGrp="1"/>
-          </p:cNvSpPr>
-          <p:nvPr/>
-        </p:nvSpPr>
-        <p:spPr>
-          <a:xfrm xmlns:a="http://schemas.openxmlformats.org/drawingml/2006/main">
-            <a:off x="1000125" y="3762375"/>
-            <a:ext cx="476250" cy="419100"/>
+                <a16:creationId xmlns:a16="http://schemas.microsoft.com/office/drawing/2014/main" id="{B12145CB-4568-4E8B-AD1B-F478E1D79CDF}"/>
+              </a:ext>
+            </a:extLst>
+          </p:cNvPr>
+          <p:cNvSpPr>
+            <a:spLocks xmlns:a="http://schemas.openxmlformats.org/drawingml/2006/main" noGrp="1"/>
+          </p:cNvSpPr>
+          <p:nvPr/>
+        </p:nvSpPr>
+        <p:spPr>
+          <a:xfrm xmlns:a="http://schemas.openxmlformats.org/drawingml/2006/main">
+            <a:off x="1162050" y="3952875"/>
+            <a:ext cx="400050" cy="400050"/>
           </a:xfrm>
           <a:prstGeom xmlns:a="http://schemas.openxmlformats.org/drawingml/2006/main" prst="rect">
             <a:avLst/>
@@ -8614,9 +8620,9 @@
           <a:lstStyle xmlns:a="http://schemas.openxmlformats.org/drawingml/2006/main"/>
           <a:p xmlns:a="http://schemas.openxmlformats.org/drawingml/2006/main">
             <a:pPr algn="ctr">
-              <a:defRPr sz="1350" b="1">
-                <a:solidFill>
-                  <a:srgbClr val="FFFFFF"/>
+              <a:defRPr sz="1125" b="1">
+                <a:solidFill>
+                  <a:srgbClr val="2C6E73"/>
                 </a:solidFill>
                 <a:latin typeface="Arial"/>
                 <a:ea typeface="Arial"/>
@@ -8624,9 +8630,9 @@
               </a:defRPr>
             </a:pPr>
             <a:r>
-              <a:rPr sz="1350" b="1">
-                <a:solidFill>
-                  <a:srgbClr val="FFFFFF"/>
+              <a:rPr sz="1125" b="1">
+                <a:solidFill>
+                  <a:srgbClr val="2C6E73"/>
                 </a:solidFill>
                 <a:latin typeface="Arial"/>
                 <a:ea typeface="Arial"/>
@@ -8642,19 +8648,19 @@
           <p:cNvPr id="19" name="">
             <a:extLst xmlns:a="http://schemas.openxmlformats.org/drawingml/2006/main">
               <a:ext uri="{FF2B5EF4-FFF2-40B4-BE49-F238E27FC236}">
-                <a16:creationId xmlns:a16="http://schemas.microsoft.com/office/drawing/2014/main" id="{DC706502-EE80-4D62-9175-4B94F2DD6C03}"/>
-              </a:ext>
-            </a:extLst>
-          </p:cNvPr>
-          <p:cNvSpPr>
-            <a:spLocks xmlns:a="http://schemas.openxmlformats.org/drawingml/2006/main" noGrp="1"/>
-          </p:cNvSpPr>
-          <p:nvPr/>
-        </p:nvSpPr>
-        <p:spPr>
-          <a:xfrm xmlns:a="http://schemas.openxmlformats.org/drawingml/2006/main">
-            <a:off x="1714500" y="3667125"/>
-            <a:ext cx="9429750" cy="609600"/>
+                <a16:creationId xmlns:a16="http://schemas.microsoft.com/office/drawing/2014/main" id="{129CB256-2012-4204-8CA7-80FE13B937E1}"/>
+              </a:ext>
+            </a:extLst>
+          </p:cNvPr>
+          <p:cNvSpPr>
+            <a:spLocks xmlns:a="http://schemas.openxmlformats.org/drawingml/2006/main" noGrp="1"/>
+          </p:cNvSpPr>
+          <p:nvPr/>
+        </p:nvSpPr>
+        <p:spPr>
+          <a:xfrm xmlns:a="http://schemas.openxmlformats.org/drawingml/2006/main">
+            <a:off x="1714500" y="3867150"/>
+            <a:ext cx="9525000" cy="809625"/>
           </a:xfrm>
           <a:prstGeom xmlns:a="http://schemas.openxmlformats.org/drawingml/2006/main" prst="rect">
             <a:avLst/>
@@ -8671,7 +8677,7 @@
           <a:lstStyle xmlns:a="http://schemas.openxmlformats.org/drawingml/2006/main"/>
           <a:p xmlns:a="http://schemas.openxmlformats.org/drawingml/2006/main">
             <a:pPr algn="l">
-              <a:defRPr sz="1500" b="0">
+              <a:defRPr sz="1725" b="0">
                 <a:solidFill>
                   <a:srgbClr val="17253A"/>
                 </a:solidFill>
@@ -8681,7 +8687,7 @@
               </a:defRPr>
             </a:pPr>
             <a:r>
-              <a:rPr sz="1500" b="0">
+              <a:rPr sz="1725" b="0">
                 <a:solidFill>
                   <a:srgbClr val="17253A"/>
                 </a:solidFill>
@@ -8689,7 +8695,7 @@
                 <a:ea typeface="Arial"/>
                 <a:cs typeface="Arial"/>
               </a:rPr>
-              <a:t>Complete the calculation: 48 boxes.</a:t>
+              <a:t>864 ÷ 18</a:t>
             </a:r>
           </a:p>
         </p:txBody>
@@ -8699,28 +8705,30 @@
           <p:cNvPr id="20" name="">
             <a:extLst xmlns:a="http://schemas.openxmlformats.org/drawingml/2006/main">
               <a:ext uri="{FF2B5EF4-FFF2-40B4-BE49-F238E27FC236}">
-                <a16:creationId xmlns:a16="http://schemas.microsoft.com/office/drawing/2014/main" id="{D46E339B-7509-4BB6-93AA-7BFB958E27CF}"/>
-              </a:ext>
-            </a:extLst>
-          </p:cNvPr>
-          <p:cNvSpPr>
-            <a:spLocks xmlns:a="http://schemas.openxmlformats.org/drawingml/2006/main" noGrp="1"/>
-          </p:cNvSpPr>
-          <p:nvPr/>
-        </p:nvSpPr>
-        <p:spPr>
-          <a:xfrm xmlns:a="http://schemas.openxmlformats.org/drawingml/2006/main">
-            <a:off x="1000125" y="4476750"/>
-            <a:ext cx="476250" cy="476250"/>
-          </a:xfrm>
-          <a:prstGeom xmlns:a="http://schemas.openxmlformats.org/drawingml/2006/main" prst="ellipse">
+                <a16:creationId xmlns:a16="http://schemas.microsoft.com/office/drawing/2014/main" id="{A6CE94B7-EB36-4BA8-A28D-6D94FFDD971C}"/>
+              </a:ext>
+            </a:extLst>
+          </p:cNvPr>
+          <p:cNvSpPr>
+            <a:spLocks xmlns:a="http://schemas.openxmlformats.org/drawingml/2006/main" noGrp="1"/>
+          </p:cNvSpPr>
+          <p:nvPr/>
+        </p:nvSpPr>
+        <p:spPr>
+          <a:xfrm xmlns:a="http://schemas.openxmlformats.org/drawingml/2006/main">
+            <a:off x="1714500" y="4695825"/>
+            <a:ext cx="9334500" cy="9525"/>
+          </a:xfrm>
+          <a:prstGeom xmlns:a="http://schemas.openxmlformats.org/drawingml/2006/main" prst="rect">
             <a:avLst/>
           </a:prstGeom>
           <a:solidFill xmlns:a="http://schemas.openxmlformats.org/drawingml/2006/main">
-            <a:srgbClr val="2C6E73"/>
+            <a:srgbClr val="D9E0E6"/>
           </a:solidFill>
           <a:ln xmlns:a="http://schemas.openxmlformats.org/drawingml/2006/main" w="0">
-            <a:noFill/>
+            <a:solidFill>
+              <a:srgbClr val="D9E0E6"/>
+            </a:solidFill>
           </a:ln>
         </p:spPr>
       </p:sp>
@@ -8729,19 +8737,19 @@
           <p:cNvPr id="21" name="">
             <a:extLst xmlns:a="http://schemas.openxmlformats.org/drawingml/2006/main">
               <a:ext uri="{FF2B5EF4-FFF2-40B4-BE49-F238E27FC236}">
-                <a16:creationId xmlns:a16="http://schemas.microsoft.com/office/drawing/2014/main" id="{DB3304E8-0A87-4674-96EB-5EC78690A618}"/>
-              </a:ext>
-            </a:extLst>
-          </p:cNvPr>
-          <p:cNvSpPr>
-            <a:spLocks xmlns:a="http://schemas.openxmlformats.org/drawingml/2006/main" noGrp="1"/>
-          </p:cNvSpPr>
-          <p:nvPr/>
-        </p:nvSpPr>
-        <p:spPr>
-          <a:xfrm xmlns:a="http://schemas.openxmlformats.org/drawingml/2006/main">
-            <a:off x="1000125" y="4505325"/>
-            <a:ext cx="476250" cy="419100"/>
+                <a16:creationId xmlns:a16="http://schemas.microsoft.com/office/drawing/2014/main" id="{D561DECE-1DB4-4280-A2BB-8E44043D9DAA}"/>
+              </a:ext>
+            </a:extLst>
+          </p:cNvPr>
+          <p:cNvSpPr>
+            <a:spLocks xmlns:a="http://schemas.openxmlformats.org/drawingml/2006/main" noGrp="1"/>
+          </p:cNvSpPr>
+          <p:nvPr/>
+        </p:nvSpPr>
+        <p:spPr>
+          <a:xfrm xmlns:a="http://schemas.openxmlformats.org/drawingml/2006/main">
+            <a:off x="1162050" y="4829175"/>
+            <a:ext cx="400050" cy="400050"/>
           </a:xfrm>
           <a:prstGeom xmlns:a="http://schemas.openxmlformats.org/drawingml/2006/main" prst="rect">
             <a:avLst/>
@@ -8758,9 +8766,9 @@
           <a:lstStyle xmlns:a="http://schemas.openxmlformats.org/drawingml/2006/main"/>
           <a:p xmlns:a="http://schemas.openxmlformats.org/drawingml/2006/main">
             <a:pPr algn="ctr">
-              <a:defRPr sz="1350" b="1">
-                <a:solidFill>
-                  <a:srgbClr val="FFFFFF"/>
+              <a:defRPr sz="1125" b="1">
+                <a:solidFill>
+                  <a:srgbClr val="2F785D"/>
                 </a:solidFill>
                 <a:latin typeface="Arial"/>
                 <a:ea typeface="Arial"/>
@@ -8768,9 +8776,9 @@
               </a:defRPr>
             </a:pPr>
             <a:r>
-              <a:rPr sz="1350" b="1">
-                <a:solidFill>
-                  <a:srgbClr val="FFFFFF"/>
+              <a:rPr sz="1125" b="1">
+                <a:solidFill>
+                  <a:srgbClr val="2F785D"/>
                 </a:solidFill>
                 <a:latin typeface="Arial"/>
                 <a:ea typeface="Arial"/>
@@ -8786,19 +8794,19 @@
           <p:cNvPr id="22" name="">
             <a:extLst xmlns:a="http://schemas.openxmlformats.org/drawingml/2006/main">
               <a:ext uri="{FF2B5EF4-FFF2-40B4-BE49-F238E27FC236}">
-                <a16:creationId xmlns:a16="http://schemas.microsoft.com/office/drawing/2014/main" id="{AF8172DD-4E37-4AD6-8299-196FAE3721A5}"/>
-              </a:ext>
-            </a:extLst>
-          </p:cNvPr>
-          <p:cNvSpPr>
-            <a:spLocks xmlns:a="http://schemas.openxmlformats.org/drawingml/2006/main" noGrp="1"/>
-          </p:cNvSpPr>
-          <p:nvPr/>
-        </p:nvSpPr>
-        <p:spPr>
-          <a:xfrm xmlns:a="http://schemas.openxmlformats.org/drawingml/2006/main">
-            <a:off x="1714500" y="4410075"/>
-            <a:ext cx="9429750" cy="609600"/>
+                <a16:creationId xmlns:a16="http://schemas.microsoft.com/office/drawing/2014/main" id="{AB43DE5F-2B02-4E54-A4DD-37A4501CC720}"/>
+              </a:ext>
+            </a:extLst>
+          </p:cNvPr>
+          <p:cNvSpPr>
+            <a:spLocks xmlns:a="http://schemas.openxmlformats.org/drawingml/2006/main" noGrp="1"/>
+          </p:cNvSpPr>
+          <p:nvPr/>
+        </p:nvSpPr>
+        <p:spPr>
+          <a:xfrm xmlns:a="http://schemas.openxmlformats.org/drawingml/2006/main">
+            <a:off x="1714500" y="4743450"/>
+            <a:ext cx="9525000" cy="809625"/>
           </a:xfrm>
           <a:prstGeom xmlns:a="http://schemas.openxmlformats.org/drawingml/2006/main" prst="rect">
             <a:avLst/>
@@ -8815,7 +8823,7 @@
           <a:lstStyle xmlns:a="http://schemas.openxmlformats.org/drawingml/2006/main"/>
           <a:p xmlns:a="http://schemas.openxmlformats.org/drawingml/2006/main">
             <a:pPr algn="l">
-              <a:defRPr sz="1500" b="1">
+              <a:defRPr sz="1725" b="1">
                 <a:solidFill>
                   <a:srgbClr val="2F785D"/>
                 </a:solidFill>
@@ -8825,7 +8833,7 @@
               </a:defRPr>
             </a:pPr>
             <a:r>
-              <a:rPr sz="1500" b="1">
+              <a:rPr sz="1725" b="1">
                 <a:solidFill>
                   <a:srgbClr val="2F785D"/>
                 </a:solidFill>
@@ -8833,7 +8841,7 @@
                 <a:ea typeface="Arial"/>
                 <a:cs typeface="Arial"/>
               </a:rPr>
-              <a:t>Check the result: Complete each step, label sub-totals and check the final answer in context.</a:t>
+              <a:t>48 boxes per shop</a:t>
             </a:r>
           </a:p>
         </p:txBody>
@@ -8841,7 +8849,7 @@
     </p:spTree>
     <p:extLst>
       <p:ext uri="{BB962C8B-B14F-4D97-AF65-F5344CB8AC3E}">
-        <p14:creationId xmlns:p14="http://schemas.microsoft.com/office/powerpoint/2010/main" val="1887207671"/>
+        <p14:creationId xmlns:p14="http://schemas.microsoft.com/office/powerpoint/2010/main" val="1026224571"/>
       </p:ext>
     </p:extLst>
   </p:cSld>
@@ -9134,7 +9142,7 @@
           <p:cNvPr id="15" name="">
             <a:extLst xmlns:a="http://schemas.openxmlformats.org/drawingml/2006/main">
               <a:ext uri="{FF2B5EF4-FFF2-40B4-BE49-F238E27FC236}">
-                <a16:creationId xmlns:a16="http://schemas.microsoft.com/office/drawing/2014/main" id="{67E6AAC3-85DF-4132-9277-A10EA12AE868}"/>
+                <a16:creationId xmlns:a16="http://schemas.microsoft.com/office/drawing/2014/main" id="{E34197B2-9F14-4430-9797-9750A5E51BFA}"/>
               </a:ext>
             </a:extLst>
           </p:cNvPr>
@@ -9166,7 +9174,7 @@
           <p:cNvPr id="2" name="">
             <a:extLst xmlns:a="http://schemas.openxmlformats.org/drawingml/2006/main">
               <a:ext uri="{FF2B5EF4-FFF2-40B4-BE49-F238E27FC236}">
-                <a16:creationId xmlns:a16="http://schemas.microsoft.com/office/drawing/2014/main" id="{44543F7B-6D28-4F79-8430-85680E290860}"/>
+                <a16:creationId xmlns:a16="http://schemas.microsoft.com/office/drawing/2014/main" id="{60F4A89E-3622-4BE1-B54F-CA9FE9C50207}"/>
               </a:ext>
             </a:extLst>
           </p:cNvPr>
@@ -9223,7 +9231,7 @@
           <p:cNvPr id="3" name="">
             <a:extLst xmlns:a="http://schemas.openxmlformats.org/drawingml/2006/main">
               <a:ext uri="{FF2B5EF4-FFF2-40B4-BE49-F238E27FC236}">
-                <a16:creationId xmlns:a16="http://schemas.microsoft.com/office/drawing/2014/main" id="{73D5ADD6-CB5D-46AD-9C5A-E11846665965}"/>
+                <a16:creationId xmlns:a16="http://schemas.microsoft.com/office/drawing/2014/main" id="{C902D288-9D05-4738-B75E-3C0ABAF99043}"/>
               </a:ext>
             </a:extLst>
           </p:cNvPr>
@@ -9255,7 +9263,7 @@
           <p:cNvPr id="4" name="">
             <a:extLst xmlns:a="http://schemas.openxmlformats.org/drawingml/2006/main">
               <a:ext uri="{FF2B5EF4-FFF2-40B4-BE49-F238E27FC236}">
-                <a16:creationId xmlns:a16="http://schemas.microsoft.com/office/drawing/2014/main" id="{C35CFC49-E7CF-4670-88C1-6A7C30D1FA6D}"/>
+                <a16:creationId xmlns:a16="http://schemas.microsoft.com/office/drawing/2014/main" id="{5FA03D0A-1DCF-46E6-8902-473E5755C693}"/>
               </a:ext>
             </a:extLst>
           </p:cNvPr>
@@ -9312,7 +9320,7 @@
           <p:cNvPr id="5" name="">
             <a:extLst xmlns:a="http://schemas.openxmlformats.org/drawingml/2006/main">
               <a:ext uri="{FF2B5EF4-FFF2-40B4-BE49-F238E27FC236}">
-                <a16:creationId xmlns:a16="http://schemas.microsoft.com/office/drawing/2014/main" id="{8A3DC195-0771-4DD6-8D0D-BE351E22F4BC}"/>
+                <a16:creationId xmlns:a16="http://schemas.microsoft.com/office/drawing/2014/main" id="{B2AF122E-56BF-4B48-97C5-FF14A31A9C79}"/>
               </a:ext>
             </a:extLst>
           </p:cNvPr>
@@ -9369,7 +9377,7 @@
           <p:cNvPr id="6" name="">
             <a:extLst xmlns:a="http://schemas.openxmlformats.org/drawingml/2006/main">
               <a:ext uri="{FF2B5EF4-FFF2-40B4-BE49-F238E27FC236}">
-                <a16:creationId xmlns:a16="http://schemas.microsoft.com/office/drawing/2014/main" id="{BEAFB985-7B84-4570-A184-3020745219CE}"/>
+                <a16:creationId xmlns:a16="http://schemas.microsoft.com/office/drawing/2014/main" id="{CFFBFF17-93BE-4F2B-B89E-FEA200A6ED1B}"/>
               </a:ext>
             </a:extLst>
           </p:cNvPr>
@@ -9426,7 +9434,7 @@
           <p:cNvPr id="7" name="">
             <a:extLst xmlns:a="http://schemas.openxmlformats.org/drawingml/2006/main">
               <a:ext uri="{FF2B5EF4-FFF2-40B4-BE49-F238E27FC236}">
-                <a16:creationId xmlns:a16="http://schemas.microsoft.com/office/drawing/2014/main" id="{FBA1D824-5261-449A-B5F8-07FD8A618783}"/>
+                <a16:creationId xmlns:a16="http://schemas.microsoft.com/office/drawing/2014/main" id="{F3020792-002D-45A5-90F3-EFE0FBAD7010}"/>
               </a:ext>
             </a:extLst>
           </p:cNvPr>
@@ -9458,7 +9466,7 @@
           <p:cNvPr id="8" name="">
             <a:extLst xmlns:a="http://schemas.openxmlformats.org/drawingml/2006/main">
               <a:ext uri="{FF2B5EF4-FFF2-40B4-BE49-F238E27FC236}">
-                <a16:creationId xmlns:a16="http://schemas.microsoft.com/office/drawing/2014/main" id="{7D161080-7D46-4BCF-8CA2-32E6FC0F57AE}"/>
+                <a16:creationId xmlns:a16="http://schemas.microsoft.com/office/drawing/2014/main" id="{3F30CE52-E4D3-4E01-ADF3-4A97A0DB9280}"/>
               </a:ext>
             </a:extLst>
           </p:cNvPr>
@@ -9515,7 +9523,7 @@
           <p:cNvPr id="9" name="">
             <a:extLst xmlns:a="http://schemas.openxmlformats.org/drawingml/2006/main">
               <a:ext uri="{FF2B5EF4-FFF2-40B4-BE49-F238E27FC236}">
-                <a16:creationId xmlns:a16="http://schemas.microsoft.com/office/drawing/2014/main" id="{6FB6B105-345B-4EF7-B341-5563648EA1A7}"/>
+                <a16:creationId xmlns:a16="http://schemas.microsoft.com/office/drawing/2014/main" id="{DB7216B5-ACE3-4200-A2FA-BCC4DB91035A}"/>
               </a:ext>
             </a:extLst>
           </p:cNvPr>
@@ -9572,7 +9580,7 @@
           <p:cNvPr id="10" name="">
             <a:extLst xmlns:a="http://schemas.openxmlformats.org/drawingml/2006/main">
               <a:ext uri="{FF2B5EF4-FFF2-40B4-BE49-F238E27FC236}">
-                <a16:creationId xmlns:a16="http://schemas.microsoft.com/office/drawing/2014/main" id="{98D27BCD-0878-4365-ACC6-828AA7BA7473}"/>
+                <a16:creationId xmlns:a16="http://schemas.microsoft.com/office/drawing/2014/main" id="{1C4138D5-946C-4900-ADD6-89072B9FD272}"/>
               </a:ext>
             </a:extLst>
           </p:cNvPr>
@@ -9629,7 +9637,7 @@
           <p:cNvPr id="11" name="">
             <a:extLst xmlns:a="http://schemas.openxmlformats.org/drawingml/2006/main">
               <a:ext uri="{FF2B5EF4-FFF2-40B4-BE49-F238E27FC236}">
-                <a16:creationId xmlns:a16="http://schemas.microsoft.com/office/drawing/2014/main" id="{A6715FD6-6047-4840-9B22-23483C1D906D}"/>
+                <a16:creationId xmlns:a16="http://schemas.microsoft.com/office/drawing/2014/main" id="{9B2B2D76-F6BC-4F94-916B-7ED95317AC66}"/>
               </a:ext>
             </a:extLst>
           </p:cNvPr>
@@ -9686,7 +9694,7 @@
           <p:cNvPr id="12" name="">
             <a:extLst xmlns:a="http://schemas.openxmlformats.org/drawingml/2006/main">
               <a:ext uri="{FF2B5EF4-FFF2-40B4-BE49-F238E27FC236}">
-                <a16:creationId xmlns:a16="http://schemas.microsoft.com/office/drawing/2014/main" id="{1D59BF07-342D-4348-9AE3-161EDB8EA325}"/>
+                <a16:creationId xmlns:a16="http://schemas.microsoft.com/office/drawing/2014/main" id="{EF4CC9B9-3169-41A2-A228-7D804095A72C}"/>
               </a:ext>
             </a:extLst>
           </p:cNvPr>
@@ -9718,7 +9726,7 @@
           <p:cNvPr id="13" name="">
             <a:extLst xmlns:a="http://schemas.openxmlformats.org/drawingml/2006/main">
               <a:ext uri="{FF2B5EF4-FFF2-40B4-BE49-F238E27FC236}">
-                <a16:creationId xmlns:a16="http://schemas.microsoft.com/office/drawing/2014/main" id="{DC07273E-59DC-400B-B9AB-1412D280D562}"/>
+                <a16:creationId xmlns:a16="http://schemas.microsoft.com/office/drawing/2014/main" id="{29722412-0BDA-4B86-9ABB-8E2BBB1252DE}"/>
               </a:ext>
             </a:extLst>
           </p:cNvPr>
@@ -9775,7 +9783,7 @@
           <p:cNvPr id="14" name="">
             <a:extLst xmlns:a="http://schemas.openxmlformats.org/drawingml/2006/main">
               <a:ext uri="{FF2B5EF4-FFF2-40B4-BE49-F238E27FC236}">
-                <a16:creationId xmlns:a16="http://schemas.microsoft.com/office/drawing/2014/main" id="{35CC6167-EE24-4367-B58B-3246DAAC5386}"/>
+                <a16:creationId xmlns:a16="http://schemas.microsoft.com/office/drawing/2014/main" id="{491E397E-105B-4D69-B37B-3453BBED3E4B}"/>
               </a:ext>
             </a:extLst>
           </p:cNvPr>
@@ -9830,7 +9838,7 @@
     </p:spTree>
     <p:extLst>
       <p:ext uri="{BB962C8B-B14F-4D97-AF65-F5344CB8AC3E}">
-        <p14:creationId xmlns:p14="http://schemas.microsoft.com/office/powerpoint/2010/main" val="1200284540"/>
+        <p14:creationId xmlns:p14="http://schemas.microsoft.com/office/powerpoint/2010/main" val="543655443"/>
       </p:ext>
     </p:extLst>
   </p:cSld>
@@ -10031,7 +10039,7 @@
           <p:cNvPr id="16" name="">
             <a:extLst xmlns:a="http://schemas.openxmlformats.org/drawingml/2006/main">
               <a:ext uri="{FF2B5EF4-FFF2-40B4-BE49-F238E27FC236}">
-                <a16:creationId xmlns:a16="http://schemas.microsoft.com/office/drawing/2014/main" id="{4B893848-55D1-4FCE-9E23-F6769F9E2AB9}"/>
+                <a16:creationId xmlns:a16="http://schemas.microsoft.com/office/drawing/2014/main" id="{78441074-1A9C-49FC-BD2A-6D981E204F64}"/>
               </a:ext>
             </a:extLst>
           </p:cNvPr>
@@ -10063,7 +10071,7 @@
           <p:cNvPr id="2" name="">
             <a:extLst xmlns:a="http://schemas.openxmlformats.org/drawingml/2006/main">
               <a:ext uri="{FF2B5EF4-FFF2-40B4-BE49-F238E27FC236}">
-                <a16:creationId xmlns:a16="http://schemas.microsoft.com/office/drawing/2014/main" id="{2F613251-261D-429D-90CC-3149BFB35B99}"/>
+                <a16:creationId xmlns:a16="http://schemas.microsoft.com/office/drawing/2014/main" id="{987FA8EF-91C6-4927-8475-0FAB7B8C8869}"/>
               </a:ext>
             </a:extLst>
           </p:cNvPr>
@@ -10120,7 +10128,7 @@
           <p:cNvPr id="3" name="">
             <a:extLst xmlns:a="http://schemas.openxmlformats.org/drawingml/2006/main">
               <a:ext uri="{FF2B5EF4-FFF2-40B4-BE49-F238E27FC236}">
-                <a16:creationId xmlns:a16="http://schemas.microsoft.com/office/drawing/2014/main" id="{66A311C9-877E-497D-9223-E2124CE79155}"/>
+                <a16:creationId xmlns:a16="http://schemas.microsoft.com/office/drawing/2014/main" id="{B8F948B7-2AEC-40FA-8331-F4495EB417CC}"/>
               </a:ext>
             </a:extLst>
           </p:cNvPr>
@@ -10152,7 +10160,7 @@
           <p:cNvPr id="4" name="">
             <a:extLst xmlns:a="http://schemas.openxmlformats.org/drawingml/2006/main">
               <a:ext uri="{FF2B5EF4-FFF2-40B4-BE49-F238E27FC236}">
-                <a16:creationId xmlns:a16="http://schemas.microsoft.com/office/drawing/2014/main" id="{B2AE71E2-54A2-4B69-AF5D-FF024693AF08}"/>
+                <a16:creationId xmlns:a16="http://schemas.microsoft.com/office/drawing/2014/main" id="{9E53D131-A4D5-4D0D-B915-13DFF62C9032}"/>
               </a:ext>
             </a:extLst>
           </p:cNvPr>
@@ -10209,7 +10217,7 @@
           <p:cNvPr id="5" name="">
             <a:extLst xmlns:a="http://schemas.openxmlformats.org/drawingml/2006/main">
               <a:ext uri="{FF2B5EF4-FFF2-40B4-BE49-F238E27FC236}">
-                <a16:creationId xmlns:a16="http://schemas.microsoft.com/office/drawing/2014/main" id="{CA6D7331-FC4E-4479-B927-5AC3712AA507}"/>
+                <a16:creationId xmlns:a16="http://schemas.microsoft.com/office/drawing/2014/main" id="{36481C63-B4AD-4A53-BB1D-F958DAD4F32B}"/>
               </a:ext>
             </a:extLst>
           </p:cNvPr>
@@ -10266,7 +10274,7 @@
           <p:cNvPr id="6" name="">
             <a:extLst xmlns:a="http://schemas.openxmlformats.org/drawingml/2006/main">
               <a:ext uri="{FF2B5EF4-FFF2-40B4-BE49-F238E27FC236}">
-                <a16:creationId xmlns:a16="http://schemas.microsoft.com/office/drawing/2014/main" id="{9415E23E-F733-4068-B199-454747E43CF0}"/>
+                <a16:creationId xmlns:a16="http://schemas.microsoft.com/office/drawing/2014/main" id="{41F341AD-2B8F-45CF-B2E2-BDB5F1948708}"/>
               </a:ext>
             </a:extLst>
           </p:cNvPr>
@@ -10323,7 +10331,7 @@
           <p:cNvPr id="7" name="">
             <a:extLst xmlns:a="http://schemas.openxmlformats.org/drawingml/2006/main">
               <a:ext uri="{FF2B5EF4-FFF2-40B4-BE49-F238E27FC236}">
-                <a16:creationId xmlns:a16="http://schemas.microsoft.com/office/drawing/2014/main" id="{251158E9-FA5F-4829-8FBB-27D83FFF2431}"/>
+                <a16:creationId xmlns:a16="http://schemas.microsoft.com/office/drawing/2014/main" id="{7CAE3045-5646-473D-9A51-C38ED5C625A9}"/>
               </a:ext>
             </a:extLst>
           </p:cNvPr>
@@ -10355,7 +10363,7 @@
           <p:cNvPr id="8" name="">
             <a:extLst xmlns:a="http://schemas.openxmlformats.org/drawingml/2006/main">
               <a:ext uri="{FF2B5EF4-FFF2-40B4-BE49-F238E27FC236}">
-                <a16:creationId xmlns:a16="http://schemas.microsoft.com/office/drawing/2014/main" id="{6F932EF6-4B7F-44F7-A909-FDA6377ECB38}"/>
+                <a16:creationId xmlns:a16="http://schemas.microsoft.com/office/drawing/2014/main" id="{7B6E1326-FA81-4D47-92C3-37B1933BC053}"/>
               </a:ext>
             </a:extLst>
           </p:cNvPr>
@@ -10412,7 +10420,7 @@
           <p:cNvPr id="9" name="">
             <a:extLst xmlns:a="http://schemas.openxmlformats.org/drawingml/2006/main">
               <a:ext uri="{FF2B5EF4-FFF2-40B4-BE49-F238E27FC236}">
-                <a16:creationId xmlns:a16="http://schemas.microsoft.com/office/drawing/2014/main" id="{51728181-BFDE-4EB7-BA77-3B150D785BE1}"/>
+                <a16:creationId xmlns:a16="http://schemas.microsoft.com/office/drawing/2014/main" id="{C45414C3-B2F3-4138-89D2-2A709F1BF185}"/>
               </a:ext>
             </a:extLst>
           </p:cNvPr>
@@ -10469,7 +10477,7 @@
           <p:cNvPr id="10" name="">
             <a:extLst xmlns:a="http://schemas.openxmlformats.org/drawingml/2006/main">
               <a:ext uri="{FF2B5EF4-FFF2-40B4-BE49-F238E27FC236}">
-                <a16:creationId xmlns:a16="http://schemas.microsoft.com/office/drawing/2014/main" id="{E450EA48-17CF-4E7F-9CA7-1A6128153DBF}"/>
+                <a16:creationId xmlns:a16="http://schemas.microsoft.com/office/drawing/2014/main" id="{6DE8E868-E15D-4E38-93A7-91CBD4C0B955}"/>
               </a:ext>
             </a:extLst>
           </p:cNvPr>
@@ -10526,7 +10534,7 @@
           <p:cNvPr id="11" name="">
             <a:extLst xmlns:a="http://schemas.openxmlformats.org/drawingml/2006/main">
               <a:ext uri="{FF2B5EF4-FFF2-40B4-BE49-F238E27FC236}">
-                <a16:creationId xmlns:a16="http://schemas.microsoft.com/office/drawing/2014/main" id="{0CD08FA7-28C3-48CE-B0A7-06A288522E27}"/>
+                <a16:creationId xmlns:a16="http://schemas.microsoft.com/office/drawing/2014/main" id="{3509756F-0C3B-4068-9988-BB4C436997F5}"/>
               </a:ext>
             </a:extLst>
           </p:cNvPr>
@@ -10583,7 +10591,7 @@
           <p:cNvPr id="12" name="">
             <a:extLst xmlns:a="http://schemas.openxmlformats.org/drawingml/2006/main">
               <a:ext uri="{FF2B5EF4-FFF2-40B4-BE49-F238E27FC236}">
-                <a16:creationId xmlns:a16="http://schemas.microsoft.com/office/drawing/2014/main" id="{AE14EB5A-CED8-4721-A80C-1CE34B790BEE}"/>
+                <a16:creationId xmlns:a16="http://schemas.microsoft.com/office/drawing/2014/main" id="{F0FEA7DD-89A4-4B69-B55A-648B8FFE7BCE}"/>
               </a:ext>
             </a:extLst>
           </p:cNvPr>
@@ -10640,7 +10648,7 @@
           <p:cNvPr id="13" name="">
             <a:extLst xmlns:a="http://schemas.openxmlformats.org/drawingml/2006/main">
               <a:ext uri="{FF2B5EF4-FFF2-40B4-BE49-F238E27FC236}">
-                <a16:creationId xmlns:a16="http://schemas.microsoft.com/office/drawing/2014/main" id="{92E97B50-056D-4AD2-B005-E32A83600A41}"/>
+                <a16:creationId xmlns:a16="http://schemas.microsoft.com/office/drawing/2014/main" id="{EF9962AF-DC04-4030-8866-E1EA1442DA0F}"/>
               </a:ext>
             </a:extLst>
           </p:cNvPr>
@@ -10697,7 +10705,7 @@
           <p:cNvPr id="14" name="">
             <a:extLst xmlns:a="http://schemas.openxmlformats.org/drawingml/2006/main">
               <a:ext uri="{FF2B5EF4-FFF2-40B4-BE49-F238E27FC236}">
-                <a16:creationId xmlns:a16="http://schemas.microsoft.com/office/drawing/2014/main" id="{DA7CF19B-2333-4476-A336-605FD70D3083}"/>
+                <a16:creationId xmlns:a16="http://schemas.microsoft.com/office/drawing/2014/main" id="{9779DE8E-BD2C-4A51-9A46-23449DC898CB}"/>
               </a:ext>
             </a:extLst>
           </p:cNvPr>
@@ -10754,7 +10762,7 @@
           <p:cNvPr id="15" name="">
             <a:extLst xmlns:a="http://schemas.openxmlformats.org/drawingml/2006/main">
               <a:ext uri="{FF2B5EF4-FFF2-40B4-BE49-F238E27FC236}">
-                <a16:creationId xmlns:a16="http://schemas.microsoft.com/office/drawing/2014/main" id="{CE840893-28CD-4E9A-AEA7-AB515DC413E2}"/>
+                <a16:creationId xmlns:a16="http://schemas.microsoft.com/office/drawing/2014/main" id="{05F85B7E-C2F6-4C43-9B35-93EF6D746195}"/>
               </a:ext>
             </a:extLst>
           </p:cNvPr>
@@ -10809,7 +10817,7 @@
     </p:spTree>
     <p:extLst>
       <p:ext uri="{BB962C8B-B14F-4D97-AF65-F5344CB8AC3E}">
-        <p14:creationId xmlns:p14="http://schemas.microsoft.com/office/powerpoint/2010/main" val="1312727282"/>
+        <p14:creationId xmlns:p14="http://schemas.microsoft.com/office/powerpoint/2010/main" val="249965607"/>
       </p:ext>
     </p:extLst>
   </p:cSld>
@@ -10964,7 +10972,7 @@
           <p:cNvPr id="16" name="">
             <a:extLst xmlns:a="http://schemas.openxmlformats.org/drawingml/2006/main">
               <a:ext uri="{FF2B5EF4-FFF2-40B4-BE49-F238E27FC236}">
-                <a16:creationId xmlns:a16="http://schemas.microsoft.com/office/drawing/2014/main" id="{D94025E5-BF0A-4A4C-AE40-23DB8A6BC0FF}"/>
+                <a16:creationId xmlns:a16="http://schemas.microsoft.com/office/drawing/2014/main" id="{2EC1D716-817E-4B96-85C9-70A46E0BA911}"/>
               </a:ext>
             </a:extLst>
           </p:cNvPr>
@@ -10996,7 +11004,7 @@
           <p:cNvPr id="2" name="">
             <a:extLst xmlns:a="http://schemas.openxmlformats.org/drawingml/2006/main">
               <a:ext uri="{FF2B5EF4-FFF2-40B4-BE49-F238E27FC236}">
-                <a16:creationId xmlns:a16="http://schemas.microsoft.com/office/drawing/2014/main" id="{544D5EFF-4B93-44D1-8571-E90778DEF4A2}"/>
+                <a16:creationId xmlns:a16="http://schemas.microsoft.com/office/drawing/2014/main" id="{6459D16B-E616-43A8-8BC1-B1B4E14A4E04}"/>
               </a:ext>
             </a:extLst>
           </p:cNvPr>
@@ -11053,7 +11061,7 @@
           <p:cNvPr id="3" name="">
             <a:extLst xmlns:a="http://schemas.openxmlformats.org/drawingml/2006/main">
               <a:ext uri="{FF2B5EF4-FFF2-40B4-BE49-F238E27FC236}">
-                <a16:creationId xmlns:a16="http://schemas.microsoft.com/office/drawing/2014/main" id="{220BAB64-CD38-42DA-A056-6956BD76E55C}"/>
+                <a16:creationId xmlns:a16="http://schemas.microsoft.com/office/drawing/2014/main" id="{79EFB5E9-8747-4D5E-B733-07BD3A0DA0C9}"/>
               </a:ext>
             </a:extLst>
           </p:cNvPr>
@@ -11085,7 +11093,7 @@
           <p:cNvPr id="4" name="">
             <a:extLst xmlns:a="http://schemas.openxmlformats.org/drawingml/2006/main">
               <a:ext uri="{FF2B5EF4-FFF2-40B4-BE49-F238E27FC236}">
-                <a16:creationId xmlns:a16="http://schemas.microsoft.com/office/drawing/2014/main" id="{531EC1BC-8956-4363-B49C-382575254714}"/>
+                <a16:creationId xmlns:a16="http://schemas.microsoft.com/office/drawing/2014/main" id="{F6767FE4-E80B-419C-93EF-B2DF2C6B238C}"/>
               </a:ext>
             </a:extLst>
           </p:cNvPr>
@@ -11142,7 +11150,7 @@
           <p:cNvPr id="5" name="">
             <a:extLst xmlns:a="http://schemas.openxmlformats.org/drawingml/2006/main">
               <a:ext uri="{FF2B5EF4-FFF2-40B4-BE49-F238E27FC236}">
-                <a16:creationId xmlns:a16="http://schemas.microsoft.com/office/drawing/2014/main" id="{DDC49EB8-2C9E-48C7-B1DA-4105E7FB577D}"/>
+                <a16:creationId xmlns:a16="http://schemas.microsoft.com/office/drawing/2014/main" id="{38F9337F-1267-48C4-BE35-41E7332F5177}"/>
               </a:ext>
             </a:extLst>
           </p:cNvPr>
@@ -11199,7 +11207,7 @@
           <p:cNvPr id="6" name="">
             <a:extLst xmlns:a="http://schemas.openxmlformats.org/drawingml/2006/main">
               <a:ext uri="{FF2B5EF4-FFF2-40B4-BE49-F238E27FC236}">
-                <a16:creationId xmlns:a16="http://schemas.microsoft.com/office/drawing/2014/main" id="{CD8EB424-9EDE-4383-AACB-ACD229ED3C72}"/>
+                <a16:creationId xmlns:a16="http://schemas.microsoft.com/office/drawing/2014/main" id="{EECC14CA-D8F9-432A-9216-CA4A04506821}"/>
               </a:ext>
             </a:extLst>
           </p:cNvPr>
@@ -11256,7 +11264,7 @@
           <p:cNvPr id="7" name="">
             <a:extLst xmlns:a="http://schemas.openxmlformats.org/drawingml/2006/main">
               <a:ext uri="{FF2B5EF4-FFF2-40B4-BE49-F238E27FC236}">
-                <a16:creationId xmlns:a16="http://schemas.microsoft.com/office/drawing/2014/main" id="{A266D1E5-9856-4A0C-992C-23EFC6144341}"/>
+                <a16:creationId xmlns:a16="http://schemas.microsoft.com/office/drawing/2014/main" id="{F74BB20D-CBCC-4EEB-B1B8-89245C33FBC3}"/>
               </a:ext>
             </a:extLst>
           </p:cNvPr>
@@ -11288,7 +11296,7 @@
           <p:cNvPr id="8" name="">
             <a:extLst xmlns:a="http://schemas.openxmlformats.org/drawingml/2006/main">
               <a:ext uri="{FF2B5EF4-FFF2-40B4-BE49-F238E27FC236}">
-                <a16:creationId xmlns:a16="http://schemas.microsoft.com/office/drawing/2014/main" id="{860D9641-2126-40CC-B531-DDFE2F57831B}"/>
+                <a16:creationId xmlns:a16="http://schemas.microsoft.com/office/drawing/2014/main" id="{156CDCDA-6F3B-448B-9133-B3E8DA894A05}"/>
               </a:ext>
             </a:extLst>
           </p:cNvPr>
@@ -11345,7 +11353,7 @@
           <p:cNvPr id="9" name="">
             <a:extLst xmlns:a="http://schemas.openxmlformats.org/drawingml/2006/main">
               <a:ext uri="{FF2B5EF4-FFF2-40B4-BE49-F238E27FC236}">
-                <a16:creationId xmlns:a16="http://schemas.microsoft.com/office/drawing/2014/main" id="{B6A05611-E81C-4B5B-B4EF-DF5FFFA3E36E}"/>
+                <a16:creationId xmlns:a16="http://schemas.microsoft.com/office/drawing/2014/main" id="{708B200B-EE63-4427-A7E8-5433671D046D}"/>
               </a:ext>
             </a:extLst>
           </p:cNvPr>
@@ -11406,7 +11414,7 @@
           <p:nvPr/>
         </p:nvPicPr>
         <p:blipFill>
-          <a:blip xmlns:r="http://schemas.openxmlformats.org/officeDocument/2006/relationships" xmlns:a="http://schemas.openxmlformats.org/drawingml/2006/main" r:embed="Rd1d37f6383704fb9"/>
+          <a:blip xmlns:r="http://schemas.openxmlformats.org/officeDocument/2006/relationships" xmlns:a="http://schemas.openxmlformats.org/drawingml/2006/main" r:embed="R96a74241beaa4779"/>
           <a:stretch xmlns:a="http://schemas.openxmlformats.org/drawingml/2006/main"/>
         </p:blipFill>
         <p:spPr>
@@ -11424,7 +11432,7 @@
           <p:cNvPr id="11" name="">
             <a:extLst xmlns:a="http://schemas.openxmlformats.org/drawingml/2006/main">
               <a:ext uri="{FF2B5EF4-FFF2-40B4-BE49-F238E27FC236}">
-                <a16:creationId xmlns:a16="http://schemas.microsoft.com/office/drawing/2014/main" id="{8C52D7EB-4C04-4B08-8373-4BC1CCE7B8B5}"/>
+                <a16:creationId xmlns:a16="http://schemas.microsoft.com/office/drawing/2014/main" id="{2F0431F8-A5C1-4AE4-804D-6F983620341A}"/>
               </a:ext>
             </a:extLst>
           </p:cNvPr>
@@ -11481,7 +11489,7 @@
           <p:cNvPr id="12" name="">
             <a:extLst xmlns:a="http://schemas.openxmlformats.org/drawingml/2006/main">
               <a:ext uri="{FF2B5EF4-FFF2-40B4-BE49-F238E27FC236}">
-                <a16:creationId xmlns:a16="http://schemas.microsoft.com/office/drawing/2014/main" id="{7759F9EE-1C84-49C0-8604-E90AF68C181C}"/>
+                <a16:creationId xmlns:a16="http://schemas.microsoft.com/office/drawing/2014/main" id="{E93685B7-2E32-4BF1-B524-925E7CBA4A49}"/>
               </a:ext>
             </a:extLst>
           </p:cNvPr>
@@ -11538,7 +11546,7 @@
           <p:cNvPr id="13" name="">
             <a:extLst xmlns:a="http://schemas.openxmlformats.org/drawingml/2006/main">
               <a:ext uri="{FF2B5EF4-FFF2-40B4-BE49-F238E27FC236}">
-                <a16:creationId xmlns:a16="http://schemas.microsoft.com/office/drawing/2014/main" id="{F962AB6C-CAFE-4A02-A1D1-585BC23138EC}"/>
+                <a16:creationId xmlns:a16="http://schemas.microsoft.com/office/drawing/2014/main" id="{1215B8E9-9FEB-442D-9D93-B28577EEEFC9}"/>
               </a:ext>
             </a:extLst>
           </p:cNvPr>
@@ -11570,7 +11578,7 @@
           <p:cNvPr id="14" name="">
             <a:extLst xmlns:a="http://schemas.openxmlformats.org/drawingml/2006/main">
               <a:ext uri="{FF2B5EF4-FFF2-40B4-BE49-F238E27FC236}">
-                <a16:creationId xmlns:a16="http://schemas.microsoft.com/office/drawing/2014/main" id="{29BD1956-3125-4509-A662-AB78AE21C1A7}"/>
+                <a16:creationId xmlns:a16="http://schemas.microsoft.com/office/drawing/2014/main" id="{0D8F55C9-E8EC-4465-9B87-39BAAD69A4FA}"/>
               </a:ext>
             </a:extLst>
           </p:cNvPr>
@@ -11627,7 +11635,7 @@
           <p:cNvPr id="15" name="">
             <a:extLst xmlns:a="http://schemas.openxmlformats.org/drawingml/2006/main">
               <a:ext uri="{FF2B5EF4-FFF2-40B4-BE49-F238E27FC236}">
-                <a16:creationId xmlns:a16="http://schemas.microsoft.com/office/drawing/2014/main" id="{062CA299-D512-4655-BACB-3F73C878E163}"/>
+                <a16:creationId xmlns:a16="http://schemas.microsoft.com/office/drawing/2014/main" id="{E1877170-7B5F-4E30-86F7-7A4104FA1608}"/>
               </a:ext>
             </a:extLst>
           </p:cNvPr>
@@ -11682,7 +11690,7 @@
     </p:spTree>
     <p:extLst>
       <p:ext uri="{BB962C8B-B14F-4D97-AF65-F5344CB8AC3E}">
-        <p14:creationId xmlns:p14="http://schemas.microsoft.com/office/powerpoint/2010/main" val="990369124"/>
+        <p14:creationId xmlns:p14="http://schemas.microsoft.com/office/powerpoint/2010/main" val="1671621785"/>
       </p:ext>
     </p:extLst>
   </p:cSld>
@@ -11837,7 +11845,7 @@
           <p:cNvPr id="23" name="">
             <a:extLst xmlns:a="http://schemas.openxmlformats.org/drawingml/2006/main">
               <a:ext uri="{FF2B5EF4-FFF2-40B4-BE49-F238E27FC236}">
-                <a16:creationId xmlns:a16="http://schemas.microsoft.com/office/drawing/2014/main" id="{48E6058F-112F-45EE-83AF-1CA20DB99DE9}"/>
+                <a16:creationId xmlns:a16="http://schemas.microsoft.com/office/drawing/2014/main" id="{4235F66D-C7B1-4A15-9460-345A63B5D4AA}"/>
               </a:ext>
             </a:extLst>
           </p:cNvPr>
@@ -11869,7 +11877,7 @@
           <p:cNvPr id="2" name="">
             <a:extLst xmlns:a="http://schemas.openxmlformats.org/drawingml/2006/main">
               <a:ext uri="{FF2B5EF4-FFF2-40B4-BE49-F238E27FC236}">
-                <a16:creationId xmlns:a16="http://schemas.microsoft.com/office/drawing/2014/main" id="{B92C8245-DD7C-47FA-ABD0-A2BBEB12312A}"/>
+                <a16:creationId xmlns:a16="http://schemas.microsoft.com/office/drawing/2014/main" id="{A1DEE925-42C5-43B3-B047-9703BB2C5669}"/>
               </a:ext>
             </a:extLst>
           </p:cNvPr>
@@ -11926,7 +11934,7 @@
           <p:cNvPr id="3" name="">
             <a:extLst xmlns:a="http://schemas.openxmlformats.org/drawingml/2006/main">
               <a:ext uri="{FF2B5EF4-FFF2-40B4-BE49-F238E27FC236}">
-                <a16:creationId xmlns:a16="http://schemas.microsoft.com/office/drawing/2014/main" id="{E3B2F7CD-64ED-4971-A4BC-DCB924CB03F3}"/>
+                <a16:creationId xmlns:a16="http://schemas.microsoft.com/office/drawing/2014/main" id="{8946DB5E-D042-4365-AD8A-EFDE14FB0562}"/>
               </a:ext>
             </a:extLst>
           </p:cNvPr>
@@ -11958,7 +11966,7 @@
           <p:cNvPr id="4" name="">
             <a:extLst xmlns:a="http://schemas.openxmlformats.org/drawingml/2006/main">
               <a:ext uri="{FF2B5EF4-FFF2-40B4-BE49-F238E27FC236}">
-                <a16:creationId xmlns:a16="http://schemas.microsoft.com/office/drawing/2014/main" id="{047D4AA5-9411-4367-B8A0-254F27096C08}"/>
+                <a16:creationId xmlns:a16="http://schemas.microsoft.com/office/drawing/2014/main" id="{555A7D03-1560-4A0F-A64E-B6501503F4EB}"/>
               </a:ext>
             </a:extLst>
           </p:cNvPr>
@@ -12015,7 +12023,7 @@
           <p:cNvPr id="5" name="">
             <a:extLst xmlns:a="http://schemas.openxmlformats.org/drawingml/2006/main">
               <a:ext uri="{FF2B5EF4-FFF2-40B4-BE49-F238E27FC236}">
-                <a16:creationId xmlns:a16="http://schemas.microsoft.com/office/drawing/2014/main" id="{A2ECCCB2-2614-4405-ADCF-F0546D1B0DD0}"/>
+                <a16:creationId xmlns:a16="http://schemas.microsoft.com/office/drawing/2014/main" id="{9586D0F3-FE09-4DC5-8B1E-49676FE43138}"/>
               </a:ext>
             </a:extLst>
           </p:cNvPr>
@@ -12072,7 +12080,7 @@
           <p:cNvPr id="6" name="">
             <a:extLst xmlns:a="http://schemas.openxmlformats.org/drawingml/2006/main">
               <a:ext uri="{FF2B5EF4-FFF2-40B4-BE49-F238E27FC236}">
-                <a16:creationId xmlns:a16="http://schemas.microsoft.com/office/drawing/2014/main" id="{E1348AE2-C25E-4BE4-9B82-3CF90192B506}"/>
+                <a16:creationId xmlns:a16="http://schemas.microsoft.com/office/drawing/2014/main" id="{F9828E24-D415-452E-A94D-9ED99A8651C0}"/>
               </a:ext>
             </a:extLst>
           </p:cNvPr>
@@ -12129,7 +12137,7 @@
           <p:cNvPr id="7" name="">
             <a:extLst xmlns:a="http://schemas.openxmlformats.org/drawingml/2006/main">
               <a:ext uri="{FF2B5EF4-FFF2-40B4-BE49-F238E27FC236}">
-                <a16:creationId xmlns:a16="http://schemas.microsoft.com/office/drawing/2014/main" id="{CA3A18B3-C1F4-4C5A-8FE0-E0103A5F5253}"/>
+                <a16:creationId xmlns:a16="http://schemas.microsoft.com/office/drawing/2014/main" id="{187E44C2-5246-406B-81AE-D56CE05A0F18}"/>
               </a:ext>
             </a:extLst>
           </p:cNvPr>
@@ -12161,7 +12169,7 @@
           <p:cNvPr id="8" name="">
             <a:extLst xmlns:a="http://schemas.openxmlformats.org/drawingml/2006/main">
               <a:ext uri="{FF2B5EF4-FFF2-40B4-BE49-F238E27FC236}">
-                <a16:creationId xmlns:a16="http://schemas.microsoft.com/office/drawing/2014/main" id="{52251AFB-0676-4E7C-923F-A31B0E59C6A2}"/>
+                <a16:creationId xmlns:a16="http://schemas.microsoft.com/office/drawing/2014/main" id="{9D800FF1-547C-41E9-A145-3352DAFB9176}"/>
               </a:ext>
             </a:extLst>
           </p:cNvPr>
@@ -12218,7 +12226,7 @@
           <p:cNvPr id="9" name="">
             <a:extLst xmlns:a="http://schemas.openxmlformats.org/drawingml/2006/main">
               <a:ext uri="{FF2B5EF4-FFF2-40B4-BE49-F238E27FC236}">
-                <a16:creationId xmlns:a16="http://schemas.microsoft.com/office/drawing/2014/main" id="{E30BA29D-0392-424A-A84C-3229876504F8}"/>
+                <a16:creationId xmlns:a16="http://schemas.microsoft.com/office/drawing/2014/main" id="{0CA7CF48-86C5-446F-AA8B-E5D99EC235B5}"/>
               </a:ext>
             </a:extLst>
           </p:cNvPr>
@@ -12275,7 +12283,7 @@
           <p:cNvPr id="10" name="">
             <a:extLst xmlns:a="http://schemas.openxmlformats.org/drawingml/2006/main">
               <a:ext uri="{FF2B5EF4-FFF2-40B4-BE49-F238E27FC236}">
-                <a16:creationId xmlns:a16="http://schemas.microsoft.com/office/drawing/2014/main" id="{EE3C19EB-CC9F-483A-B753-FFB28C66D91E}"/>
+                <a16:creationId xmlns:a16="http://schemas.microsoft.com/office/drawing/2014/main" id="{ED459B33-9D08-49EF-982B-CD10F00DD7FE}"/>
               </a:ext>
             </a:extLst>
           </p:cNvPr>
@@ -12309,7 +12317,7 @@
           <p:cNvPr id="11" name="">
             <a:extLst xmlns:a="http://schemas.openxmlformats.org/drawingml/2006/main">
               <a:ext uri="{FF2B5EF4-FFF2-40B4-BE49-F238E27FC236}">
-                <a16:creationId xmlns:a16="http://schemas.microsoft.com/office/drawing/2014/main" id="{DCB92C8A-BFF0-4F38-89A8-704153C7C55F}"/>
+                <a16:creationId xmlns:a16="http://schemas.microsoft.com/office/drawing/2014/main" id="{69C821F9-9ACA-4E9E-A453-D0563F7E1010}"/>
               </a:ext>
             </a:extLst>
           </p:cNvPr>
@@ -12341,7 +12349,7 @@
           <p:cNvPr id="12" name="">
             <a:extLst xmlns:a="http://schemas.openxmlformats.org/drawingml/2006/main">
               <a:ext uri="{FF2B5EF4-FFF2-40B4-BE49-F238E27FC236}">
-                <a16:creationId xmlns:a16="http://schemas.microsoft.com/office/drawing/2014/main" id="{250F0F76-6F0D-4EA7-A779-A140E894A3D4}"/>
+                <a16:creationId xmlns:a16="http://schemas.microsoft.com/office/drawing/2014/main" id="{1B8F40F0-448E-4335-8FE1-CE3E42033486}"/>
               </a:ext>
             </a:extLst>
           </p:cNvPr>
@@ -12398,7 +12406,7 @@
           <p:cNvPr id="13" name="">
             <a:extLst xmlns:a="http://schemas.openxmlformats.org/drawingml/2006/main">
               <a:ext uri="{FF2B5EF4-FFF2-40B4-BE49-F238E27FC236}">
-                <a16:creationId xmlns:a16="http://schemas.microsoft.com/office/drawing/2014/main" id="{397091AD-AAAD-4514-AE4A-DD33D3C16274}"/>
+                <a16:creationId xmlns:a16="http://schemas.microsoft.com/office/drawing/2014/main" id="{658D5C2E-0929-4A36-911C-513ADD40D0A2}"/>
               </a:ext>
             </a:extLst>
           </p:cNvPr>
@@ -12455,7 +12463,7 @@
           <p:cNvPr id="14" name="">
             <a:extLst xmlns:a="http://schemas.openxmlformats.org/drawingml/2006/main">
               <a:ext uri="{FF2B5EF4-FFF2-40B4-BE49-F238E27FC236}">
-                <a16:creationId xmlns:a16="http://schemas.microsoft.com/office/drawing/2014/main" id="{48D39503-F91D-448C-BC78-BF2D4C6F6D61}"/>
+                <a16:creationId xmlns:a16="http://schemas.microsoft.com/office/drawing/2014/main" id="{64B11C7A-3665-44CE-A8EA-441636F3E1F7}"/>
               </a:ext>
             </a:extLst>
           </p:cNvPr>
@@ -12489,7 +12497,7 @@
           <p:cNvPr id="15" name="">
             <a:extLst xmlns:a="http://schemas.openxmlformats.org/drawingml/2006/main">
               <a:ext uri="{FF2B5EF4-FFF2-40B4-BE49-F238E27FC236}">
-                <a16:creationId xmlns:a16="http://schemas.microsoft.com/office/drawing/2014/main" id="{F4B43AE8-93BF-4B81-8722-970E37A730D0}"/>
+                <a16:creationId xmlns:a16="http://schemas.microsoft.com/office/drawing/2014/main" id="{B6EEFC5D-8B31-4E40-B6D0-C73D6D4A18A3}"/>
               </a:ext>
             </a:extLst>
           </p:cNvPr>
@@ -12521,7 +12529,7 @@
           <p:cNvPr id="16" name="">
             <a:extLst xmlns:a="http://schemas.openxmlformats.org/drawingml/2006/main">
               <a:ext uri="{FF2B5EF4-FFF2-40B4-BE49-F238E27FC236}">
-                <a16:creationId xmlns:a16="http://schemas.microsoft.com/office/drawing/2014/main" id="{55213D4C-DFA2-4A7F-BDF4-D12B340A99C2}"/>
+                <a16:creationId xmlns:a16="http://schemas.microsoft.com/office/drawing/2014/main" id="{FC8B90F2-5F11-4EF0-ADC6-C5F2DFE8D549}"/>
               </a:ext>
             </a:extLst>
           </p:cNvPr>
@@ -12578,7 +12586,7 @@
           <p:cNvPr id="17" name="">
             <a:extLst xmlns:a="http://schemas.openxmlformats.org/drawingml/2006/main">
               <a:ext uri="{FF2B5EF4-FFF2-40B4-BE49-F238E27FC236}">
-                <a16:creationId xmlns:a16="http://schemas.microsoft.com/office/drawing/2014/main" id="{6D7E0DF8-C0A5-458E-96D4-FA7722068E77}"/>
+                <a16:creationId xmlns:a16="http://schemas.microsoft.com/office/drawing/2014/main" id="{56C5FB6D-B61E-465B-B518-8B455727BD94}"/>
               </a:ext>
             </a:extLst>
           </p:cNvPr>
@@ -12635,7 +12643,7 @@
           <p:cNvPr id="18" name="">
             <a:extLst xmlns:a="http://schemas.openxmlformats.org/drawingml/2006/main">
               <a:ext uri="{FF2B5EF4-FFF2-40B4-BE49-F238E27FC236}">
-                <a16:creationId xmlns:a16="http://schemas.microsoft.com/office/drawing/2014/main" id="{8AA851D3-31E2-467A-AEF1-2731D2192975}"/>
+                <a16:creationId xmlns:a16="http://schemas.microsoft.com/office/drawing/2014/main" id="{F193E9F9-55E1-40A1-8CD8-656D5F065990}"/>
               </a:ext>
             </a:extLst>
           </p:cNvPr>
@@ -12669,7 +12677,7 @@
           <p:cNvPr id="19" name="">
             <a:extLst xmlns:a="http://schemas.openxmlformats.org/drawingml/2006/main">
               <a:ext uri="{FF2B5EF4-FFF2-40B4-BE49-F238E27FC236}">
-                <a16:creationId xmlns:a16="http://schemas.microsoft.com/office/drawing/2014/main" id="{1EDCF780-D713-4385-9876-2111A4C28DB4}"/>
+                <a16:creationId xmlns:a16="http://schemas.microsoft.com/office/drawing/2014/main" id="{25E47876-B479-446C-805D-F32B77B13A7C}"/>
               </a:ext>
             </a:extLst>
           </p:cNvPr>
@@ -12701,7 +12709,7 @@
           <p:cNvPr id="20" name="">
             <a:extLst xmlns:a="http://schemas.openxmlformats.org/drawingml/2006/main">
               <a:ext uri="{FF2B5EF4-FFF2-40B4-BE49-F238E27FC236}">
-                <a16:creationId xmlns:a16="http://schemas.microsoft.com/office/drawing/2014/main" id="{4B5743AB-3BEB-499A-9A95-5A5A5591EE21}"/>
+                <a16:creationId xmlns:a16="http://schemas.microsoft.com/office/drawing/2014/main" id="{7D475DB7-A704-46EB-8D8F-A1807029B896}"/>
               </a:ext>
             </a:extLst>
           </p:cNvPr>
@@ -12758,7 +12766,7 @@
           <p:cNvPr id="21" name="">
             <a:extLst xmlns:a="http://schemas.openxmlformats.org/drawingml/2006/main">
               <a:ext uri="{FF2B5EF4-FFF2-40B4-BE49-F238E27FC236}">
-                <a16:creationId xmlns:a16="http://schemas.microsoft.com/office/drawing/2014/main" id="{1BB5B62F-BAB4-4BF8-90F5-D7F1E9F22B05}"/>
+                <a16:creationId xmlns:a16="http://schemas.microsoft.com/office/drawing/2014/main" id="{18395E02-65CC-4F88-AC7A-CB8089DB974A}"/>
               </a:ext>
             </a:extLst>
           </p:cNvPr>
@@ -12815,7 +12823,7 @@
           <p:cNvPr id="22" name="">
             <a:extLst xmlns:a="http://schemas.openxmlformats.org/drawingml/2006/main">
               <a:ext uri="{FF2B5EF4-FFF2-40B4-BE49-F238E27FC236}">
-                <a16:creationId xmlns:a16="http://schemas.microsoft.com/office/drawing/2014/main" id="{D6B11872-5896-40FE-A51A-6C5840B6C8A7}"/>
+                <a16:creationId xmlns:a16="http://schemas.microsoft.com/office/drawing/2014/main" id="{652194CA-1B2A-484A-BFFC-891598C9E5F6}"/>
               </a:ext>
             </a:extLst>
           </p:cNvPr>
@@ -12870,7 +12878,7 @@
     </p:spTree>
     <p:extLst>
       <p:ext uri="{BB962C8B-B14F-4D97-AF65-F5344CB8AC3E}">
-        <p14:creationId xmlns:p14="http://schemas.microsoft.com/office/powerpoint/2010/main" val="1820294705"/>
+        <p14:creationId xmlns:p14="http://schemas.microsoft.com/office/powerpoint/2010/main" val="849768127"/>
       </p:ext>
     </p:extLst>
   </p:cSld>
@@ -13071,7 +13079,7 @@
           <p:cNvPr id="22" name="">
             <a:extLst xmlns:a="http://schemas.openxmlformats.org/drawingml/2006/main">
               <a:ext uri="{FF2B5EF4-FFF2-40B4-BE49-F238E27FC236}">
-                <a16:creationId xmlns:a16="http://schemas.microsoft.com/office/drawing/2014/main" id="{ED97B8CA-E7FE-4924-A82B-4E73B881D186}"/>
+                <a16:creationId xmlns:a16="http://schemas.microsoft.com/office/drawing/2014/main" id="{251E96FF-F097-45B8-B2BA-FBF276B58C45}"/>
               </a:ext>
             </a:extLst>
           </p:cNvPr>
@@ -13103,7 +13111,7 @@
           <p:cNvPr id="2" name="">
             <a:extLst xmlns:a="http://schemas.openxmlformats.org/drawingml/2006/main">
               <a:ext uri="{FF2B5EF4-FFF2-40B4-BE49-F238E27FC236}">
-                <a16:creationId xmlns:a16="http://schemas.microsoft.com/office/drawing/2014/main" id="{C0C79420-9FA6-4BB0-B2D7-5D69C185C08D}"/>
+                <a16:creationId xmlns:a16="http://schemas.microsoft.com/office/drawing/2014/main" id="{4B7737CD-111A-40B7-8CA5-039B8CA21089}"/>
               </a:ext>
             </a:extLst>
           </p:cNvPr>
@@ -13160,7 +13168,7 @@
           <p:cNvPr id="3" name="">
             <a:extLst xmlns:a="http://schemas.openxmlformats.org/drawingml/2006/main">
               <a:ext uri="{FF2B5EF4-FFF2-40B4-BE49-F238E27FC236}">
-                <a16:creationId xmlns:a16="http://schemas.microsoft.com/office/drawing/2014/main" id="{FF0A32A2-FFE1-468F-B715-2EE6D47D8EC5}"/>
+                <a16:creationId xmlns:a16="http://schemas.microsoft.com/office/drawing/2014/main" id="{BFD0DA6B-E6E6-440B-BE41-9F3FD68FC9BC}"/>
               </a:ext>
             </a:extLst>
           </p:cNvPr>
@@ -13192,7 +13200,7 @@
           <p:cNvPr id="4" name="">
             <a:extLst xmlns:a="http://schemas.openxmlformats.org/drawingml/2006/main">
               <a:ext uri="{FF2B5EF4-FFF2-40B4-BE49-F238E27FC236}">
-                <a16:creationId xmlns:a16="http://schemas.microsoft.com/office/drawing/2014/main" id="{E78D0126-8ADB-40C8-A2A0-BF912A2674D5}"/>
+                <a16:creationId xmlns:a16="http://schemas.microsoft.com/office/drawing/2014/main" id="{8DBD719B-EEC2-48EC-9212-BC85CA312A3D}"/>
               </a:ext>
             </a:extLst>
           </p:cNvPr>
@@ -13249,7 +13257,7 @@
           <p:cNvPr id="5" name="">
             <a:extLst xmlns:a="http://schemas.openxmlformats.org/drawingml/2006/main">
               <a:ext uri="{FF2B5EF4-FFF2-40B4-BE49-F238E27FC236}">
-                <a16:creationId xmlns:a16="http://schemas.microsoft.com/office/drawing/2014/main" id="{856CF755-58A8-462E-AF0B-B885C95F3C9A}"/>
+                <a16:creationId xmlns:a16="http://schemas.microsoft.com/office/drawing/2014/main" id="{C8DF94D0-16D4-4767-AB8C-2319465D8E92}"/>
               </a:ext>
             </a:extLst>
           </p:cNvPr>
@@ -13306,7 +13314,7 @@
           <p:cNvPr id="6" name="">
             <a:extLst xmlns:a="http://schemas.openxmlformats.org/drawingml/2006/main">
               <a:ext uri="{FF2B5EF4-FFF2-40B4-BE49-F238E27FC236}">
-                <a16:creationId xmlns:a16="http://schemas.microsoft.com/office/drawing/2014/main" id="{480CC423-6433-4BFA-92F9-4955F6A37AED}"/>
+                <a16:creationId xmlns:a16="http://schemas.microsoft.com/office/drawing/2014/main" id="{98322CB8-FF8F-4825-8BCC-6A97E0CD518C}"/>
               </a:ext>
             </a:extLst>
           </p:cNvPr>
@@ -13363,7 +13371,7 @@
           <p:cNvPr id="7" name="">
             <a:extLst xmlns:a="http://schemas.openxmlformats.org/drawingml/2006/main">
               <a:ext uri="{FF2B5EF4-FFF2-40B4-BE49-F238E27FC236}">
-                <a16:creationId xmlns:a16="http://schemas.microsoft.com/office/drawing/2014/main" id="{F353E8F2-F23F-4B59-97CA-09DC90679B19}"/>
+                <a16:creationId xmlns:a16="http://schemas.microsoft.com/office/drawing/2014/main" id="{BEEDEC03-4446-4552-86E4-D707E7F99FD4}"/>
               </a:ext>
             </a:extLst>
           </p:cNvPr>
@@ -13395,7 +13403,7 @@
           <p:cNvPr id="8" name="">
             <a:extLst xmlns:a="http://schemas.openxmlformats.org/drawingml/2006/main">
               <a:ext uri="{FF2B5EF4-FFF2-40B4-BE49-F238E27FC236}">
-                <a16:creationId xmlns:a16="http://schemas.microsoft.com/office/drawing/2014/main" id="{DC29EC1F-7FBF-49DE-894C-3C746D7B7054}"/>
+                <a16:creationId xmlns:a16="http://schemas.microsoft.com/office/drawing/2014/main" id="{8C818E31-24FA-494C-A807-6A671337FB60}"/>
               </a:ext>
             </a:extLst>
           </p:cNvPr>
@@ -13452,7 +13460,7 @@
           <p:cNvPr id="9" name="">
             <a:extLst xmlns:a="http://schemas.openxmlformats.org/drawingml/2006/main">
               <a:ext uri="{FF2B5EF4-FFF2-40B4-BE49-F238E27FC236}">
-                <a16:creationId xmlns:a16="http://schemas.microsoft.com/office/drawing/2014/main" id="{0A5AE4D8-EFC4-4F03-9380-3C5A91AF010C}"/>
+                <a16:creationId xmlns:a16="http://schemas.microsoft.com/office/drawing/2014/main" id="{23E4A7F9-F6BF-4602-BD94-6E2A480ADEF8}"/>
               </a:ext>
             </a:extLst>
           </p:cNvPr>
@@ -13509,7 +13517,7 @@
           <p:cNvPr id="10" name="">
             <a:extLst xmlns:a="http://schemas.openxmlformats.org/drawingml/2006/main">
               <a:ext uri="{FF2B5EF4-FFF2-40B4-BE49-F238E27FC236}">
-                <a16:creationId xmlns:a16="http://schemas.microsoft.com/office/drawing/2014/main" id="{1427C2B9-2784-4C2D-AA56-284F0084A3E0}"/>
+                <a16:creationId xmlns:a16="http://schemas.microsoft.com/office/drawing/2014/main" id="{0E4BE43B-DAD9-40EF-81DE-F68CBAB32256}"/>
               </a:ext>
             </a:extLst>
           </p:cNvPr>
@@ -13543,7 +13551,7 @@
           <p:cNvPr id="11" name="">
             <a:extLst xmlns:a="http://schemas.openxmlformats.org/drawingml/2006/main">
               <a:ext uri="{FF2B5EF4-FFF2-40B4-BE49-F238E27FC236}">
-                <a16:creationId xmlns:a16="http://schemas.microsoft.com/office/drawing/2014/main" id="{BAE66A9C-B55C-453A-93A7-7700EC283BFE}"/>
+                <a16:creationId xmlns:a16="http://schemas.microsoft.com/office/drawing/2014/main" id="{D805317B-65CD-4A2E-BD93-5FB7DF8B320F}"/>
               </a:ext>
             </a:extLst>
           </p:cNvPr>
@@ -13575,7 +13583,7 @@
           <p:cNvPr id="12" name="">
             <a:extLst xmlns:a="http://schemas.openxmlformats.org/drawingml/2006/main">
               <a:ext uri="{FF2B5EF4-FFF2-40B4-BE49-F238E27FC236}">
-                <a16:creationId xmlns:a16="http://schemas.microsoft.com/office/drawing/2014/main" id="{5FA5C8EF-1931-4567-BF6C-13EDB5F48A16}"/>
+                <a16:creationId xmlns:a16="http://schemas.microsoft.com/office/drawing/2014/main" id="{4FE48CF4-71D5-4515-96B8-C09C47600A47}"/>
               </a:ext>
             </a:extLst>
           </p:cNvPr>
@@ -13632,7 +13640,7 @@
           <p:cNvPr id="13" name="">
             <a:extLst xmlns:a="http://schemas.openxmlformats.org/drawingml/2006/main">
               <a:ext uri="{FF2B5EF4-FFF2-40B4-BE49-F238E27FC236}">
-                <a16:creationId xmlns:a16="http://schemas.microsoft.com/office/drawing/2014/main" id="{483FA68F-BD2E-4164-984C-2393263422BA}"/>
+                <a16:creationId xmlns:a16="http://schemas.microsoft.com/office/drawing/2014/main" id="{CDF44304-0D8C-4EA0-8B7A-352199143A9B}"/>
               </a:ext>
             </a:extLst>
           </p:cNvPr>
@@ -13689,7 +13697,7 @@
           <p:cNvPr id="14" name="">
             <a:extLst xmlns:a="http://schemas.openxmlformats.org/drawingml/2006/main">
               <a:ext uri="{FF2B5EF4-FFF2-40B4-BE49-F238E27FC236}">
-                <a16:creationId xmlns:a16="http://schemas.microsoft.com/office/drawing/2014/main" id="{F6CF8E2D-07B7-4EC4-86B2-48183AA04665}"/>
+                <a16:creationId xmlns:a16="http://schemas.microsoft.com/office/drawing/2014/main" id="{532CF36F-9420-4468-9A73-A941A28423CB}"/>
               </a:ext>
             </a:extLst>
           </p:cNvPr>
@@ -13723,7 +13731,7 @@
           <p:cNvPr id="15" name="">
             <a:extLst xmlns:a="http://schemas.openxmlformats.org/drawingml/2006/main">
               <a:ext uri="{FF2B5EF4-FFF2-40B4-BE49-F238E27FC236}">
-                <a16:creationId xmlns:a16="http://schemas.microsoft.com/office/drawing/2014/main" id="{0FFFE282-962E-4465-86EB-53515C9996E3}"/>
+                <a16:creationId xmlns:a16="http://schemas.microsoft.com/office/drawing/2014/main" id="{C9EBCDEC-0BD6-468A-BBA1-E632759ABC9C}"/>
               </a:ext>
             </a:extLst>
           </p:cNvPr>
@@ -13755,7 +13763,7 @@
           <p:cNvPr id="16" name="">
             <a:extLst xmlns:a="http://schemas.openxmlformats.org/drawingml/2006/main">
               <a:ext uri="{FF2B5EF4-FFF2-40B4-BE49-F238E27FC236}">
-                <a16:creationId xmlns:a16="http://schemas.microsoft.com/office/drawing/2014/main" id="{84C7D516-9B35-4198-AA4A-AC59AE2456E4}"/>
+                <a16:creationId xmlns:a16="http://schemas.microsoft.com/office/drawing/2014/main" id="{DC67E98A-7B4D-4C9E-AEC4-E10257B459AF}"/>
               </a:ext>
             </a:extLst>
           </p:cNvPr>
@@ -13812,7 +13820,7 @@
           <p:cNvPr id="17" name="">
             <a:extLst xmlns:a="http://schemas.openxmlformats.org/drawingml/2006/main">
               <a:ext uri="{FF2B5EF4-FFF2-40B4-BE49-F238E27FC236}">
-                <a16:creationId xmlns:a16="http://schemas.microsoft.com/office/drawing/2014/main" id="{29201814-D68E-4D37-81A8-319B8287F737}"/>
+                <a16:creationId xmlns:a16="http://schemas.microsoft.com/office/drawing/2014/main" id="{86E7F73B-1C4F-493C-9D75-2345BB46283F}"/>
               </a:ext>
             </a:extLst>
           </p:cNvPr>
@@ -13869,7 +13877,7 @@
           <p:cNvPr id="18" name="">
             <a:extLst xmlns:a="http://schemas.openxmlformats.org/drawingml/2006/main">
               <a:ext uri="{FF2B5EF4-FFF2-40B4-BE49-F238E27FC236}">
-                <a16:creationId xmlns:a16="http://schemas.microsoft.com/office/drawing/2014/main" id="{FFE53EB0-D9D4-43DC-B787-39B5E73A9FC3}"/>
+                <a16:creationId xmlns:a16="http://schemas.microsoft.com/office/drawing/2014/main" id="{EFA0EA2D-5C73-495C-B11A-E16C74A1D3F8}"/>
               </a:ext>
             </a:extLst>
           </p:cNvPr>
@@ -13903,7 +13911,7 @@
           <p:cNvPr id="19" name="">
             <a:extLst xmlns:a="http://schemas.openxmlformats.org/drawingml/2006/main">
               <a:ext uri="{FF2B5EF4-FFF2-40B4-BE49-F238E27FC236}">
-                <a16:creationId xmlns:a16="http://schemas.microsoft.com/office/drawing/2014/main" id="{1735FF4D-909B-4181-BC0A-A7FB42E9AF6F}"/>
+                <a16:creationId xmlns:a16="http://schemas.microsoft.com/office/drawing/2014/main" id="{944F279B-FCA6-40C1-83C5-1AD27A052D51}"/>
               </a:ext>
             </a:extLst>
           </p:cNvPr>
@@ -13935,7 +13943,7 @@
           <p:cNvPr id="20" name="">
             <a:extLst xmlns:a="http://schemas.openxmlformats.org/drawingml/2006/main">
               <a:ext uri="{FF2B5EF4-FFF2-40B4-BE49-F238E27FC236}">
-                <a16:creationId xmlns:a16="http://schemas.microsoft.com/office/drawing/2014/main" id="{3E8A1025-0218-4C03-99DA-4AD8C093C07D}"/>
+                <a16:creationId xmlns:a16="http://schemas.microsoft.com/office/drawing/2014/main" id="{873AFFA5-4F73-4EF5-BE24-2D65FD89E01A}"/>
               </a:ext>
             </a:extLst>
           </p:cNvPr>
@@ -13992,7 +14000,7 @@
           <p:cNvPr id="21" name="">
             <a:extLst xmlns:a="http://schemas.openxmlformats.org/drawingml/2006/main">
               <a:ext uri="{FF2B5EF4-FFF2-40B4-BE49-F238E27FC236}">
-                <a16:creationId xmlns:a16="http://schemas.microsoft.com/office/drawing/2014/main" id="{F4C711B9-A22F-4F65-A6AD-A0B6807093C5}"/>
+                <a16:creationId xmlns:a16="http://schemas.microsoft.com/office/drawing/2014/main" id="{E4E00225-503A-4EA7-A3C7-0A151D06C46E}"/>
               </a:ext>
             </a:extLst>
           </p:cNvPr>
@@ -14047,7 +14055,7 @@
     </p:spTree>
     <p:extLst>
       <p:ext uri="{BB962C8B-B14F-4D97-AF65-F5344CB8AC3E}">
-        <p14:creationId xmlns:p14="http://schemas.microsoft.com/office/powerpoint/2010/main" val="1351110671"/>
+        <p14:creationId xmlns:p14="http://schemas.microsoft.com/office/powerpoint/2010/main" val="710288630"/>
       </p:ext>
     </p:extLst>
   </p:cSld>
